--- a/docs/build/slides.pptx
+++ b/docs/build/slides.pptx
@@ -4632,7 +4632,15 @@
             </a:pPr>
             <a:r>
               <a:rPr b="1"/>
-              <a:t>Mulham Fetna · Mohammad Zein Qabbani</a:t>
+              <a:t>«University Name — Faculty»</a:t>
+            </a:r>
+            <a:r>
+              <a:rPr/>
+              <a:t> · </a:t>
+            </a:r>
+            <a:r>
+              <a:rPr b="1"/>
+              <a:t>«Department / Program»</a:t>
             </a:r>
           </a:p>
           <a:p>
@@ -4641,6 +4649,48 @@
             </a:pPr>
             <a:r>
               <a:rPr/>
+              <a:t>Students: </a:t>
+            </a:r>
+            <a:r>
+              <a:rPr b="1"/>
+              <a:t>Mulham Fetna</a:t>
+            </a:r>
+            <a:r>
+              <a:rPr/>
+              <a:t> · </a:t>
+            </a:r>
+            <a:r>
+              <a:rPr b="1"/>
+              <a:t>Mohammad Zein Qabbani</a:t>
+            </a:r>
+          </a:p>
+          <a:p>
+            <a:pPr lvl="0" indent="0" marL="0">
+              <a:buNone/>
+            </a:pPr>
+            <a:r>
+              <a:rPr/>
+              <a:t>Supervisor: </a:t>
+            </a:r>
+            <a:r>
+              <a:rPr b="1"/>
+              <a:t>«Dr. Supervisor Name»</a:t>
+            </a:r>
+            <a:r>
+              <a:rPr/>
+              <a:t> · Academic year: </a:t>
+            </a:r>
+            <a:r>
+              <a:rPr b="1"/>
+              <a:t>«2025–2026»</a:t>
+            </a:r>
+          </a:p>
+          <a:p>
+            <a:pPr lvl="0" indent="0" marL="0">
+              <a:buNone/>
+            </a:pPr>
+            <a:r>
+              <a:rPr i="1"/>
               <a:t>Research seminar — CNN classification of PMSM operating states from time–frequency images</a:t>
             </a:r>
           </a:p>

--- a/docs/build/slides.pptx
+++ b/docs/build/slides.pptx
@@ -26,6 +26,9 @@
     <p:sldId id="274" r:id="rId20"/>
     <p:sldId id="275" r:id="rId21"/>
     <p:sldId id="276" r:id="rId22"/>
+    <p:sldId id="277" r:id="rId23"/>
+    <p:sldId id="278" r:id="rId24"/>
+    <p:sldId id="279" r:id="rId25"/>
   </p:sldIdLst>
   <p:sldSz cx="9144000" cy="5143500" type="screen16x9"/>
   <p:notesSz cx="6858000" cy="9144000"/>
@@ -3164,6 +3167,381 @@
       </p:grpSpPr>
       <p:sp>
         <p:nvSpPr>
+          <p:cNvPr id="3" name="Content Placeholder 2"/>
+          <p:cNvSpPr>
+            <a:spLocks noGrp="1"/>
+          </p:cNvSpPr>
+          <p:nvPr>
+            <p:ph idx="1"/>
+          </p:nvPr>
+        </p:nvSpPr>
+        <p:spPr/>
+        <p:txBody>
+          <a:bodyPr/>
+          <a:lstStyle/>
+          <a:p>
+            <a:pPr lvl="0" indent="0" marL="0">
+              <a:spcBef>
+                <a:spcPts val="3000"/>
+              </a:spcBef>
+              <a:buNone/>
+            </a:pPr>
+            <a:r>
+              <a:rPr b="1"/>
+              <a:t>5. Why wavelets, not Fourier</a:t>
+            </a:r>
+          </a:p>
+          <a:p>
+            <a:pPr lvl="0"/>
+            <a:r>
+              <a:rPr/>
+              <a:t>Fourier is </a:t>
+            </a:r>
+            <a:r>
+              <a:rPr b="1"/>
+              <a:t>blind to time</a:t>
+            </a:r>
+            <a:r>
+              <a:rPr/>
+              <a:t> — it can’t say </a:t>
+            </a:r>
+            <a:r>
+              <a:rPr i="1"/>
+              <a:t>when</a:t>
+            </a:r>
+            <a:r>
+              <a:rPr/>
+              <a:t> a frequency occurs.</a:t>
+            </a:r>
+          </a:p>
+          <a:p>
+            <a:pPr lvl="0"/>
+            <a:r>
+              <a:rPr/>
+              <a:t>Motor fault signals are </a:t>
+            </a:r>
+            <a:r>
+              <a:rPr b="1"/>
+              <a:t>non-stationary</a:t>
+            </a:r>
+            <a:r>
+              <a:rPr/>
+              <a:t> (transient, load-dependent).</a:t>
+            </a:r>
+          </a:p>
+          <a:p>
+            <a:pPr lvl="0"/>
+            <a:r>
+              <a:rPr/>
+              <a:t>Uncertainty principle: </a:t>
+            </a:r>
+            <a:r>
+              <a:rPr>
+                <a:latin typeface="Courier"/>
+              </a:rPr>
+              <a:t>Δt · Δf ≥ const</a:t>
+            </a:r>
+            <a:r>
+              <a:rPr/>
+              <a:t> — can’t have perfect time </a:t>
+            </a:r>
+            <a:r>
+              <a:rPr i="1"/>
+              <a:t>and</a:t>
+            </a:r>
+            <a:r>
+              <a:rPr/>
+              <a:t> frequency resolution.</a:t>
+            </a:r>
+          </a:p>
+          <a:p>
+            <a:pPr lvl="0"/>
+            <a:r>
+              <a:rPr b="1"/>
+              <a:t>Wavelets</a:t>
+            </a:r>
+            <a:r>
+              <a:rPr/>
+              <a:t> = short, localised waves → frequency-dependent resolution, ideal for transients.</a:t>
+            </a:r>
+          </a:p>
+        </p:txBody>
+      </p:sp>
+    </p:spTree>
+  </p:cSld>
+</p:sld>
+</file>
+
+<file path=ppt/slides/slide11.xml><?xml version="1.0" encoding="utf-8"?>
+<p:sld xmlns:a="http://schemas.openxmlformats.org/drawingml/2006/main" xmlns:r="http://schemas.openxmlformats.org/officeDocument/2006/relationships" xmlns:p="http://schemas.openxmlformats.org/presentationml/2006/main">
+  <p:cSld>
+    <p:spTree>
+      <p:nvGrpSpPr>
+        <p:cNvPr id="1" name=""/>
+        <p:cNvGrpSpPr/>
+        <p:nvPr/>
+      </p:nvGrpSpPr>
+      <p:grpSpPr>
+        <a:xfrm>
+          <a:off x="0" y="0"/>
+          <a:ext cx="0" cy="0"/>
+          <a:chOff x="0" y="0"/>
+          <a:chExt cx="0" cy="0"/>
+        </a:xfrm>
+      </p:grpSpPr>
+      <p:sp>
+        <p:nvSpPr>
+          <p:cNvPr id="3" name="Content Placeholder 2"/>
+          <p:cNvSpPr>
+            <a:spLocks noGrp="1"/>
+          </p:cNvSpPr>
+          <p:nvPr>
+            <p:ph idx="1"/>
+          </p:nvPr>
+        </p:nvSpPr>
+        <p:spPr/>
+        <p:txBody>
+          <a:bodyPr/>
+          <a:lstStyle/>
+          <a:p>
+            <a:pPr lvl="0" indent="0" marL="0">
+              <a:spcBef>
+                <a:spcPts val="3000"/>
+              </a:spcBef>
+              <a:buNone/>
+            </a:pPr>
+            <a:r>
+              <a:rPr b="1"/>
+              <a:t>6. The CWT &amp; scalogram</a:t>
+            </a:r>
+          </a:p>
+          <a:p>
+            <a:pPr lvl="0"/>
+            <a:r>
+              <a:rPr/>
+              <a:t>Scale the </a:t>
+            </a:r>
+            <a:r>
+              <a:rPr b="1"/>
+              <a:t>Morlet</a:t>
+            </a:r>
+            <a:r>
+              <a:rPr/>
+              <a:t> wavelet (frequency knob) and slide it (time knob).</a:t>
+            </a:r>
+          </a:p>
+          <a:p>
+            <a:pPr lvl="0"/>
+            <a:r>
+              <a:rPr/>
+              <a:t>Each coefficient = </a:t>
+            </a:r>
+            <a:r>
+              <a:rPr b="1"/>
+              <a:t>similarity</a:t>
+            </a:r>
+            <a:r>
+              <a:rPr/>
+              <a:t> of the signal to that wave at that time.</a:t>
+            </a:r>
+          </a:p>
+          <a:p>
+            <a:pPr lvl="0"/>
+            <a:r>
+              <a:rPr b="1"/>
+              <a:t>Scalogram</a:t>
+            </a:r>
+            <a:r>
+              <a:rPr/>
+              <a:t> = colour image of energy vs. time (x) and frequency (y).</a:t>
+            </a:r>
+          </a:p>
+          <a:p>
+            <a:pPr lvl="0"/>
+            <a:r>
+              <a:rPr/>
+              <a:t>Bright bands &amp; side-bands = fault signatures the CNN can </a:t>
+            </a:r>
+            <a:r>
+              <a:rPr i="1"/>
+              <a:t>see</a:t>
+            </a:r>
+            <a:r>
+              <a:rPr/>
+              <a:t>.</a:t>
+            </a:r>
+          </a:p>
+        </p:txBody>
+      </p:sp>
+    </p:spTree>
+  </p:cSld>
+</p:sld>
+</file>
+
+<file path=ppt/slides/slide12.xml><?xml version="1.0" encoding="utf-8"?>
+<p:sld xmlns:a="http://schemas.openxmlformats.org/drawingml/2006/main" xmlns:r="http://schemas.openxmlformats.org/officeDocument/2006/relationships" xmlns:p="http://schemas.openxmlformats.org/presentationml/2006/main">
+  <p:cSld>
+    <p:spTree>
+      <p:nvGrpSpPr>
+        <p:cNvPr id="1" name=""/>
+        <p:cNvGrpSpPr/>
+        <p:nvPr/>
+      </p:nvGrpSpPr>
+      <p:grpSpPr>
+        <a:xfrm>
+          <a:off x="0" y="0"/>
+          <a:ext cx="0" cy="0"/>
+          <a:chOff x="0" y="0"/>
+          <a:chExt cx="0" cy="0"/>
+        </a:xfrm>
+      </p:grpSpPr>
+      <p:sp>
+        <p:nvSpPr>
+          <p:cNvPr id="4" name="Text Placeholder 3"/>
+          <p:cNvSpPr>
+            <a:spLocks noGrp="1"/>
+          </p:cNvSpPr>
+          <p:nvPr>
+            <p:ph idx="2" sz="half" type="body"/>
+          </p:nvPr>
+        </p:nvSpPr>
+        <p:spPr/>
+        <p:txBody>
+          <a:bodyPr/>
+          <a:lstStyle/>
+          <a:p>
+            <a:pPr lvl="0" indent="0" marL="0">
+              <a:spcBef>
+                <a:spcPts val="3000"/>
+              </a:spcBef>
+              <a:buNone/>
+            </a:pPr>
+            <a:r>
+              <a:rPr b="1"/>
+              <a:t>7. Example scalograms (real KAIST data)</a:t>
+            </a:r>
+          </a:p>
+        </p:txBody>
+      </p:sp>
+      <p:pic>
+        <p:nvPicPr>
+          <p:cNvPr descr="../../results/example_scalograms_real.png" id="0" name="Picture 1"/>
+          <p:cNvPicPr>
+            <a:picLocks noGrp="1" noChangeAspect="1"/>
+          </p:cNvPicPr>
+          <p:nvPr/>
+        </p:nvPicPr>
+        <p:blipFill>
+          <a:blip r:embed="rId2"/>
+          <a:stretch>
+            <a:fillRect/>
+          </a:stretch>
+        </p:blipFill>
+        <p:spPr bwMode="auto">
+          <a:xfrm>
+            <a:off x="3568700" y="1473200"/>
+            <a:ext cx="5105400" cy="1346200"/>
+          </a:xfrm>
+          <a:prstGeom prst="rect">
+            <a:avLst/>
+          </a:prstGeom>
+          <a:noFill/>
+          <a:ln w="9525">
+            <a:noFill/>
+            <a:headEnd/>
+            <a:tailEnd/>
+          </a:ln>
+        </p:spPr>
+      </p:pic>
+      <p:sp>
+        <p:nvSpPr>
+          <p:cNvPr id="1" name="TextBox 3"/>
+          <p:cNvSpPr txBox="1"/>
+          <p:nvPr>
+            <p:ph idx="1"/>
+          </p:nvPr>
+        </p:nvSpPr>
+        <p:spPr>
+          <a:xfrm>
+            <a:off x="3568700" y="4076700"/>
+            <a:ext cx="5105400" cy="508000"/>
+          </a:xfrm>
+          <a:prstGeom prst="rect">
+            <a:avLst/>
+          </a:prstGeom>
+          <a:noFill/>
+        </p:spPr>
+        <p:txBody>
+          <a:bodyPr/>
+          <a:lstStyle/>
+          <a:p>
+            <a:pPr lvl="0" indent="0" marL="0" algn="ctr">
+              <a:buNone/>
+            </a:pPr>
+            <a:r>
+              <a:rPr/>
+              <a:t>w:1000</a:t>
+            </a:r>
+          </a:p>
+        </p:txBody>
+      </p:sp>
+      <p:sp>
+        <p:nvSpPr>
+          <p:cNvPr id="3" name="Content Placeholder 2"/>
+          <p:cNvSpPr>
+            <a:spLocks noGrp="1"/>
+          </p:cNvSpPr>
+          <p:nvPr>
+            <p:ph idx="1"/>
+          </p:nvPr>
+        </p:nvSpPr>
+        <p:spPr/>
+        <p:txBody>
+          <a:bodyPr/>
+          <a:lstStyle/>
+          <a:p>
+            <a:pPr lvl="0" indent="0" marL="0">
+              <a:buNone/>
+            </a:pPr>
+            <a:r>
+              <a:rPr/>
+              <a:t>Inter-turn fault visibly </a:t>
+            </a:r>
+            <a:r>
+              <a:rPr b="1"/>
+              <a:t>enriches the vibration time–frequency content</a:t>
+            </a:r>
+            <a:r>
+              <a:rPr/>
+              <a:t>.</a:t>
+            </a:r>
+          </a:p>
+        </p:txBody>
+      </p:sp>
+    </p:spTree>
+  </p:cSld>
+</p:sld>
+</file>
+
+<file path=ppt/slides/slide13.xml><?xml version="1.0" encoding="utf-8"?>
+<p:sld xmlns:a="http://schemas.openxmlformats.org/drawingml/2006/main" xmlns:r="http://schemas.openxmlformats.org/officeDocument/2006/relationships" xmlns:p="http://schemas.openxmlformats.org/presentationml/2006/main">
+  <p:cSld>
+    <p:spTree>
+      <p:nvGrpSpPr>
+        <p:cNvPr id="1" name=""/>
+        <p:cNvGrpSpPr/>
+        <p:nvPr/>
+      </p:nvGrpSpPr>
+      <p:grpSpPr>
+        <a:xfrm>
+          <a:off x="0" y="0"/>
+          <a:ext cx="0" cy="0"/>
+          <a:chOff x="0" y="0"/>
+          <a:chExt cx="0" cy="0"/>
+        </a:xfrm>
+      </p:grpSpPr>
+      <p:sp>
+        <p:nvSpPr>
           <p:cNvPr id="4" name="Text Placeholder 3"/>
           <p:cNvSpPr>
             <a:spLocks noGrp="1"/>
@@ -3423,7 +3801,7 @@
 </p:sld>
 </file>
 
-<file path=ppt/slides/slide11.xml><?xml version="1.0" encoding="utf-8"?>
+<file path=ppt/slides/slide14.xml><?xml version="1.0" encoding="utf-8"?>
 <p:sld xmlns:a="http://schemas.openxmlformats.org/drawingml/2006/main" xmlns:r="http://schemas.openxmlformats.org/officeDocument/2006/relationships" xmlns:p="http://schemas.openxmlformats.org/presentationml/2006/main">
   <p:cSld>
     <p:spTree>
@@ -3518,7 +3896,7 @@
 </p:sld>
 </file>
 
-<file path=ppt/slides/slide12.xml><?xml version="1.0" encoding="utf-8"?>
+<file path=ppt/slides/slide15.xml><?xml version="1.0" encoding="utf-8"?>
 <p:sld xmlns:a="http://schemas.openxmlformats.org/drawingml/2006/main" xmlns:r="http://schemas.openxmlformats.org/officeDocument/2006/relationships" xmlns:p="http://schemas.openxmlformats.org/presentationml/2006/main">
   <p:cSld>
     <p:spTree>
@@ -3640,7 +4018,7 @@
 </p:sld>
 </file>
 
-<file path=ppt/slides/slide13.xml><?xml version="1.0" encoding="utf-8"?>
+<file path=ppt/slides/slide16.xml><?xml version="1.0" encoding="utf-8"?>
 <p:sld xmlns:a="http://schemas.openxmlformats.org/drawingml/2006/main" xmlns:r="http://schemas.openxmlformats.org/officeDocument/2006/relationships" xmlns:p="http://schemas.openxmlformats.org/presentationml/2006/main">
   <p:cSld>
     <p:spTree>
@@ -3721,7 +4099,7 @@
 </p:sld>
 </file>
 
-<file path=ppt/slides/slide14.xml><?xml version="1.0" encoding="utf-8"?>
+<file path=ppt/slides/slide17.xml><?xml version="1.0" encoding="utf-8"?>
 <p:sld xmlns:a="http://schemas.openxmlformats.org/drawingml/2006/main" xmlns:r="http://schemas.openxmlformats.org/officeDocument/2006/relationships" xmlns:p="http://schemas.openxmlformats.org/presentationml/2006/main">
   <p:cSld>
     <p:spTree>
@@ -4115,7 +4493,7 @@
 </p:sld>
 </file>
 
-<file path=ppt/slides/slide15.xml><?xml version="1.0" encoding="utf-8"?>
+<file path=ppt/slides/slide18.xml><?xml version="1.0" encoding="utf-8"?>
 <p:sld xmlns:a="http://schemas.openxmlformats.org/drawingml/2006/main" xmlns:r="http://schemas.openxmlformats.org/officeDocument/2006/relationships" xmlns:p="http://schemas.openxmlformats.org/presentationml/2006/main">
   <p:cSld>
     <p:spTree>
@@ -4162,7 +4540,7 @@
 </p:sld>
 </file>
 
-<file path=ppt/slides/slide16.xml><?xml version="1.0" encoding="utf-8"?>
+<file path=ppt/slides/slide19.xml><?xml version="1.0" encoding="utf-8"?>
 <p:sld xmlns:a="http://schemas.openxmlformats.org/drawingml/2006/main" xmlns:r="http://schemas.openxmlformats.org/officeDocument/2006/relationships" xmlns:p="http://schemas.openxmlformats.org/presentationml/2006/main">
   <p:cSld>
     <p:spTree>
@@ -4299,277 +4677,6 @@
 </p:sld>
 </file>
 
-<file path=ppt/slides/slide17.xml><?xml version="1.0" encoding="utf-8"?>
-<p:sld xmlns:a="http://schemas.openxmlformats.org/drawingml/2006/main" xmlns:r="http://schemas.openxmlformats.org/officeDocument/2006/relationships" xmlns:p="http://schemas.openxmlformats.org/presentationml/2006/main">
-  <p:cSld>
-    <p:spTree>
-      <p:nvGrpSpPr>
-        <p:cNvPr id="1" name=""/>
-        <p:cNvGrpSpPr/>
-        <p:nvPr/>
-      </p:nvGrpSpPr>
-      <p:grpSpPr>
-        <a:xfrm>
-          <a:off x="0" y="0"/>
-          <a:ext cx="0" cy="0"/>
-          <a:chOff x="0" y="0"/>
-          <a:chExt cx="0" cy="0"/>
-        </a:xfrm>
-      </p:grpSpPr>
-      <p:sp>
-        <p:nvSpPr>
-          <p:cNvPr id="3" name="Content Placeholder 2"/>
-          <p:cNvSpPr>
-            <a:spLocks noGrp="1"/>
-          </p:cNvSpPr>
-          <p:nvPr>
-            <p:ph idx="1"/>
-          </p:nvPr>
-        </p:nvSpPr>
-        <p:spPr/>
-        <p:txBody>
-          <a:bodyPr/>
-          <a:lstStyle/>
-          <a:p>
-            <a:pPr lvl="0" indent="0" marL="0">
-              <a:spcBef>
-                <a:spcPts val="3000"/>
-              </a:spcBef>
-              <a:buNone/>
-            </a:pPr>
-            <a:r>
-              <a:rPr b="1"/>
-              <a:t>14. Analysis</a:t>
-            </a:r>
-          </a:p>
-          <a:p>
-            <a:pPr lvl="0"/>
-            <a:r>
-              <a:rPr b="1"/>
-              <a:t>Vibration ≫ current</a:t>
-            </a:r>
-            <a:r>
-              <a:rPr/>
-              <a:t> for inter-turn detection — physically expected (vibration responds directly; FOC suppresses current signatures).</a:t>
-            </a:r>
-          </a:p>
-          <a:p>
-            <a:pPr lvl="0"/>
-            <a:r>
-              <a:rPr b="1"/>
-              <a:t>Fusion</a:t>
-            </a:r>
-            <a:r>
-              <a:rPr/>
-              <a:t> beats current but not vibration alone on this small data.</a:t>
-            </a:r>
-          </a:p>
-          <a:p>
-            <a:pPr lvl="0"/>
-            <a:r>
-              <a:rPr/>
-              <a:t>Right </a:t>
-            </a:r>
-            <a:r>
-              <a:rPr b="1"/>
-              <a:t>metric matters</a:t>
-            </a:r>
-            <a:r>
-              <a:rPr/>
-              <a:t>: balanced accuracy exposed the majority-class collapse that raw accuracy hid.</a:t>
-            </a:r>
-          </a:p>
-        </p:txBody>
-      </p:sp>
-    </p:spTree>
-  </p:cSld>
-</p:sld>
-</file>
-
-<file path=ppt/slides/slide18.xml><?xml version="1.0" encoding="utf-8"?>
-<p:sld xmlns:a="http://schemas.openxmlformats.org/drawingml/2006/main" xmlns:r="http://schemas.openxmlformats.org/officeDocument/2006/relationships" xmlns:p="http://schemas.openxmlformats.org/presentationml/2006/main">
-  <p:cSld>
-    <p:spTree>
-      <p:nvGrpSpPr>
-        <p:cNvPr id="1" name=""/>
-        <p:cNvGrpSpPr/>
-        <p:nvPr/>
-      </p:nvGrpSpPr>
-      <p:grpSpPr>
-        <a:xfrm>
-          <a:off x="0" y="0"/>
-          <a:ext cx="0" cy="0"/>
-          <a:chOff x="0" y="0"/>
-          <a:chExt cx="0" cy="0"/>
-        </a:xfrm>
-      </p:grpSpPr>
-      <p:sp>
-        <p:nvSpPr>
-          <p:cNvPr id="3" name="Content Placeholder 2"/>
-          <p:cNvSpPr>
-            <a:spLocks noGrp="1"/>
-          </p:cNvSpPr>
-          <p:nvPr>
-            <p:ph idx="1"/>
-          </p:nvPr>
-        </p:nvSpPr>
-        <p:spPr/>
-        <p:txBody>
-          <a:bodyPr/>
-          <a:lstStyle/>
-          <a:p>
-            <a:pPr lvl="0" indent="0" marL="0">
-              <a:spcBef>
-                <a:spcPts val="3000"/>
-              </a:spcBef>
-              <a:buNone/>
-            </a:pPr>
-            <a:r>
-              <a:rPr b="1"/>
-              <a:t>15. Improvement experiments</a:t>
-            </a:r>
-          </a:p>
-          <a:p>
-            <a:pPr lvl="0"/>
-            <a:r>
-              <a:rPr b="1"/>
-              <a:t>Balancing</a:t>
-            </a:r>
-            <a:r>
-              <a:rPr/>
-              <a:t> removes the majority-class collapse (current healthy recall 0.00 → 1.00).</a:t>
-            </a:r>
-          </a:p>
-          <a:p>
-            <a:pPr lvl="0"/>
-            <a:r>
-              <a:rPr b="1"/>
-              <a:t>Image size</a:t>
-            </a:r>
-            <a:r>
-              <a:rPr/>
-              <a:t> &amp; </a:t>
-            </a:r>
-            <a:r>
-              <a:rPr b="1"/>
-              <a:t>training-set size</a:t>
-            </a:r>
-            <a:r>
-              <a:rPr/>
-              <a:t> studied (see </a:t>
-            </a:r>
-            <a:r>
-              <a:rPr>
-                <a:latin typeface="Courier"/>
-              </a:rPr>
-              <a:t>docs/experiments.md</a:t>
-            </a:r>
-            <a:r>
-              <a:rPr/>
-              <a:t>).</a:t>
-            </a:r>
-          </a:p>
-          <a:p>
-            <a:pPr lvl="0"/>
-            <a:r>
-              <a:rPr/>
-              <a:t>Overfitting controlled by dropout, global average pooling, augmentation and early stopping.</a:t>
-            </a:r>
-          </a:p>
-        </p:txBody>
-      </p:sp>
-    </p:spTree>
-  </p:cSld>
-</p:sld>
-</file>
-
-<file path=ppt/slides/slide19.xml><?xml version="1.0" encoding="utf-8"?>
-<p:sld xmlns:a="http://schemas.openxmlformats.org/drawingml/2006/main" xmlns:r="http://schemas.openxmlformats.org/officeDocument/2006/relationships" xmlns:p="http://schemas.openxmlformats.org/presentationml/2006/main">
-  <p:cSld>
-    <p:spTree>
-      <p:nvGrpSpPr>
-        <p:cNvPr id="1" name=""/>
-        <p:cNvGrpSpPr/>
-        <p:nvPr/>
-      </p:nvGrpSpPr>
-      <p:grpSpPr>
-        <a:xfrm>
-          <a:off x="0" y="0"/>
-          <a:ext cx="0" cy="0"/>
-          <a:chOff x="0" y="0"/>
-          <a:chExt cx="0" cy="0"/>
-        </a:xfrm>
-      </p:grpSpPr>
-      <p:sp>
-        <p:nvSpPr>
-          <p:cNvPr id="3" name="Content Placeholder 2"/>
-          <p:cNvSpPr>
-            <a:spLocks noGrp="1"/>
-          </p:cNvSpPr>
-          <p:nvPr>
-            <p:ph idx="1"/>
-          </p:nvPr>
-        </p:nvSpPr>
-        <p:spPr/>
-        <p:txBody>
-          <a:bodyPr/>
-          <a:lstStyle/>
-          <a:p>
-            <a:pPr lvl="0" indent="0" marL="0">
-              <a:spcBef>
-                <a:spcPts val="3000"/>
-              </a:spcBef>
-              <a:buNone/>
-            </a:pPr>
-            <a:r>
-              <a:rPr b="1"/>
-              <a:t>16. Limitations</a:t>
-            </a:r>
-          </a:p>
-          <a:p>
-            <a:pPr lvl="0"/>
-            <a:r>
-              <a:rPr/>
-              <a:t>Only </a:t>
-            </a:r>
-            <a:r>
-              <a:rPr b="1"/>
-              <a:t>4 distinct healthy recordings</a:t>
-            </a:r>
-            <a:r>
-              <a:rPr/>
-              <a:t> → perfect vibration score can’t yet exclude a </a:t>
-            </a:r>
-            <a:r>
-              <a:rPr i="1"/>
-              <a:t>recording-identity</a:t>
-            </a:r>
-            <a:r>
-              <a:rPr/>
-              <a:t> shortcut.</a:t>
-            </a:r>
-          </a:p>
-          <a:p>
-            <a:pPr lvl="0"/>
-            <a:r>
-              <a:rPr/>
-              <a:t>Demagnetization / Overload only synthetic.</a:t>
-            </a:r>
-          </a:p>
-          <a:p>
-            <a:pPr lvl="0"/>
-            <a:r>
-              <a:rPr/>
-              <a:t>Fusion comparison indicative, not strictly controlled.</a:t>
-            </a:r>
-          </a:p>
-        </p:txBody>
-      </p:sp>
-    </p:spTree>
-  </p:cSld>
-</p:sld>
-</file>
-
 <file path=ppt/slides/slide2.xml><?xml version="1.0" encoding="utf-8"?>
 <p:sld xmlns:a="http://schemas.openxmlformats.org/drawingml/2006/main" xmlns:r="http://schemas.openxmlformats.org/officeDocument/2006/relationships" xmlns:p="http://schemas.openxmlformats.org/presentationml/2006/main">
   <p:cSld>
@@ -4741,29 +4848,44 @@
             </a:pPr>
             <a:r>
               <a:rPr b="1"/>
-              <a:t>17. Conclusions &amp; future work</a:t>
+              <a:t>14. Analysis</a:t>
             </a:r>
           </a:p>
           <a:p>
             <a:pPr lvl="0"/>
             <a:r>
-              <a:rPr/>
-              <a:t>A reproducible scalogram + CNN pipeline detects inter-turn PMSM faults; </a:t>
-            </a:r>
-            <a:r>
-              <a:rPr b="1"/>
-              <a:t>vibration reaches balanced accuracy 1.00</a:t>
-            </a:r>
-            <a:r>
-              <a:rPr/>
-              <a:t> on held-out recordings.</a:t>
+              <a:rPr b="1"/>
+              <a:t>Vibration ≫ current</a:t>
+            </a:r>
+            <a:r>
+              <a:rPr/>
+              <a:t> for inter-turn detection — physically expected (vibration responds directly; FOC suppresses current signatures).</a:t>
             </a:r>
           </a:p>
           <a:p>
             <a:pPr lvl="0"/>
             <a:r>
-              <a:rPr/>
-              <a:t>Future: more independent recordings; paired multi-channel fusion; severity-aware targets; explainability (Grad-CAM); on-line deployment in the drive.</a:t>
+              <a:rPr b="1"/>
+              <a:t>Fusion</a:t>
+            </a:r>
+            <a:r>
+              <a:rPr/>
+              <a:t> beats current but not vibration alone on this small data.</a:t>
+            </a:r>
+          </a:p>
+          <a:p>
+            <a:pPr lvl="0"/>
+            <a:r>
+              <a:rPr/>
+              <a:t>Right </a:t>
+            </a:r>
+            <a:r>
+              <a:rPr b="1"/>
+              <a:t>metric matters</a:t>
+            </a:r>
+            <a:r>
+              <a:rPr/>
+              <a:t>: balanced accuracy exposed the majority-class collapse that raw accuracy hid.</a:t>
             </a:r>
           </a:p>
         </p:txBody>
@@ -4792,6 +4914,262 @@
       </p:grpSpPr>
       <p:sp>
         <p:nvSpPr>
+          <p:cNvPr id="3" name="Content Placeholder 2"/>
+          <p:cNvSpPr>
+            <a:spLocks noGrp="1"/>
+          </p:cNvSpPr>
+          <p:nvPr>
+            <p:ph idx="1"/>
+          </p:nvPr>
+        </p:nvSpPr>
+        <p:spPr/>
+        <p:txBody>
+          <a:bodyPr/>
+          <a:lstStyle/>
+          <a:p>
+            <a:pPr lvl="0" indent="0" marL="0">
+              <a:spcBef>
+                <a:spcPts val="3000"/>
+              </a:spcBef>
+              <a:buNone/>
+            </a:pPr>
+            <a:r>
+              <a:rPr b="1"/>
+              <a:t>15. Improvement experiments</a:t>
+            </a:r>
+          </a:p>
+          <a:p>
+            <a:pPr lvl="0"/>
+            <a:r>
+              <a:rPr b="1"/>
+              <a:t>Balancing</a:t>
+            </a:r>
+            <a:r>
+              <a:rPr/>
+              <a:t> removes the majority-class collapse (current healthy recall 0.00 → 1.00).</a:t>
+            </a:r>
+          </a:p>
+          <a:p>
+            <a:pPr lvl="0"/>
+            <a:r>
+              <a:rPr b="1"/>
+              <a:t>Image size</a:t>
+            </a:r>
+            <a:r>
+              <a:rPr/>
+              <a:t> &amp; </a:t>
+            </a:r>
+            <a:r>
+              <a:rPr b="1"/>
+              <a:t>training-set size</a:t>
+            </a:r>
+            <a:r>
+              <a:rPr/>
+              <a:t> studied (see </a:t>
+            </a:r>
+            <a:r>
+              <a:rPr>
+                <a:latin typeface="Courier"/>
+              </a:rPr>
+              <a:t>docs/experiments.md</a:t>
+            </a:r>
+            <a:r>
+              <a:rPr/>
+              <a:t>).</a:t>
+            </a:r>
+          </a:p>
+          <a:p>
+            <a:pPr lvl="0"/>
+            <a:r>
+              <a:rPr/>
+              <a:t>Overfitting controlled by dropout, global average pooling, augmentation and early stopping.</a:t>
+            </a:r>
+          </a:p>
+        </p:txBody>
+      </p:sp>
+    </p:spTree>
+  </p:cSld>
+</p:sld>
+</file>
+
+<file path=ppt/slides/slide22.xml><?xml version="1.0" encoding="utf-8"?>
+<p:sld xmlns:a="http://schemas.openxmlformats.org/drawingml/2006/main" xmlns:r="http://schemas.openxmlformats.org/officeDocument/2006/relationships" xmlns:p="http://schemas.openxmlformats.org/presentationml/2006/main">
+  <p:cSld>
+    <p:spTree>
+      <p:nvGrpSpPr>
+        <p:cNvPr id="1" name=""/>
+        <p:cNvGrpSpPr/>
+        <p:nvPr/>
+      </p:nvGrpSpPr>
+      <p:grpSpPr>
+        <a:xfrm>
+          <a:off x="0" y="0"/>
+          <a:ext cx="0" cy="0"/>
+          <a:chOff x="0" y="0"/>
+          <a:chExt cx="0" cy="0"/>
+        </a:xfrm>
+      </p:grpSpPr>
+      <p:sp>
+        <p:nvSpPr>
+          <p:cNvPr id="3" name="Content Placeholder 2"/>
+          <p:cNvSpPr>
+            <a:spLocks noGrp="1"/>
+          </p:cNvSpPr>
+          <p:nvPr>
+            <p:ph idx="1"/>
+          </p:nvPr>
+        </p:nvSpPr>
+        <p:spPr/>
+        <p:txBody>
+          <a:bodyPr/>
+          <a:lstStyle/>
+          <a:p>
+            <a:pPr lvl="0" indent="0" marL="0">
+              <a:spcBef>
+                <a:spcPts val="3000"/>
+              </a:spcBef>
+              <a:buNone/>
+            </a:pPr>
+            <a:r>
+              <a:rPr b="1"/>
+              <a:t>16. Limitations</a:t>
+            </a:r>
+          </a:p>
+          <a:p>
+            <a:pPr lvl="0"/>
+            <a:r>
+              <a:rPr/>
+              <a:t>Only </a:t>
+            </a:r>
+            <a:r>
+              <a:rPr b="1"/>
+              <a:t>4 distinct healthy recordings</a:t>
+            </a:r>
+            <a:r>
+              <a:rPr/>
+              <a:t> → perfect vibration score can’t yet exclude a </a:t>
+            </a:r>
+            <a:r>
+              <a:rPr i="1"/>
+              <a:t>recording-identity</a:t>
+            </a:r>
+            <a:r>
+              <a:rPr/>
+              <a:t> shortcut.</a:t>
+            </a:r>
+          </a:p>
+          <a:p>
+            <a:pPr lvl="0"/>
+            <a:r>
+              <a:rPr/>
+              <a:t>Demagnetization / Overload only synthetic.</a:t>
+            </a:r>
+          </a:p>
+          <a:p>
+            <a:pPr lvl="0"/>
+            <a:r>
+              <a:rPr/>
+              <a:t>Fusion comparison indicative, not strictly controlled.</a:t>
+            </a:r>
+          </a:p>
+        </p:txBody>
+      </p:sp>
+    </p:spTree>
+  </p:cSld>
+</p:sld>
+</file>
+
+<file path=ppt/slides/slide23.xml><?xml version="1.0" encoding="utf-8"?>
+<p:sld xmlns:a="http://schemas.openxmlformats.org/drawingml/2006/main" xmlns:r="http://schemas.openxmlformats.org/officeDocument/2006/relationships" xmlns:p="http://schemas.openxmlformats.org/presentationml/2006/main">
+  <p:cSld>
+    <p:spTree>
+      <p:nvGrpSpPr>
+        <p:cNvPr id="1" name=""/>
+        <p:cNvGrpSpPr/>
+        <p:nvPr/>
+      </p:nvGrpSpPr>
+      <p:grpSpPr>
+        <a:xfrm>
+          <a:off x="0" y="0"/>
+          <a:ext cx="0" cy="0"/>
+          <a:chOff x="0" y="0"/>
+          <a:chExt cx="0" cy="0"/>
+        </a:xfrm>
+      </p:grpSpPr>
+      <p:sp>
+        <p:nvSpPr>
+          <p:cNvPr id="3" name="Content Placeholder 2"/>
+          <p:cNvSpPr>
+            <a:spLocks noGrp="1"/>
+          </p:cNvSpPr>
+          <p:nvPr>
+            <p:ph idx="1"/>
+          </p:nvPr>
+        </p:nvSpPr>
+        <p:spPr/>
+        <p:txBody>
+          <a:bodyPr/>
+          <a:lstStyle/>
+          <a:p>
+            <a:pPr lvl="0" indent="0" marL="0">
+              <a:spcBef>
+                <a:spcPts val="3000"/>
+              </a:spcBef>
+              <a:buNone/>
+            </a:pPr>
+            <a:r>
+              <a:rPr b="1"/>
+              <a:t>17. Conclusions &amp; future work</a:t>
+            </a:r>
+          </a:p>
+          <a:p>
+            <a:pPr lvl="0"/>
+            <a:r>
+              <a:rPr/>
+              <a:t>A reproducible scalogram + CNN pipeline detects inter-turn PMSM faults; </a:t>
+            </a:r>
+            <a:r>
+              <a:rPr b="1"/>
+              <a:t>vibration reaches balanced accuracy 1.00</a:t>
+            </a:r>
+            <a:r>
+              <a:rPr/>
+              <a:t> on held-out recordings.</a:t>
+            </a:r>
+          </a:p>
+          <a:p>
+            <a:pPr lvl="0"/>
+            <a:r>
+              <a:rPr/>
+              <a:t>Future: more independent recordings; paired multi-channel fusion; severity-aware targets; explainability (Grad-CAM); on-line deployment in the drive.</a:t>
+            </a:r>
+          </a:p>
+        </p:txBody>
+      </p:sp>
+    </p:spTree>
+  </p:cSld>
+</p:sld>
+</file>
+
+<file path=ppt/slides/slide24.xml><?xml version="1.0" encoding="utf-8"?>
+<p:sld xmlns:a="http://schemas.openxmlformats.org/drawingml/2006/main" xmlns:r="http://schemas.openxmlformats.org/officeDocument/2006/relationships" xmlns:p="http://schemas.openxmlformats.org/presentationml/2006/main">
+  <p:cSld>
+    <p:spTree>
+      <p:nvGrpSpPr>
+        <p:cNvPr id="1" name=""/>
+        <p:cNvGrpSpPr/>
+        <p:nvPr/>
+      </p:nvGrpSpPr>
+      <p:grpSpPr>
+        <a:xfrm>
+          <a:off x="0" y="0"/>
+          <a:ext cx="0" cy="0"/>
+          <a:chOff x="0" y="0"/>
+          <a:chExt cx="0" cy="0"/>
+        </a:xfrm>
+      </p:grpSpPr>
+      <p:sp>
+        <p:nvSpPr>
           <p:cNvPr id="2" name="Title 1"/>
           <p:cNvSpPr>
             <a:spLocks noGrp="1"/>
@@ -5315,12 +5693,12 @@
       </p:grpSpPr>
       <p:sp>
         <p:nvSpPr>
-          <p:cNvPr id="3" name="Content Placeholder 2"/>
-          <p:cNvSpPr>
-            <a:spLocks noGrp="1"/>
-          </p:cNvSpPr>
-          <p:nvPr>
-            <p:ph idx="1"/>
+          <p:cNvPr id="4" name="Text Placeholder 3"/>
+          <p:cNvSpPr>
+            <a:spLocks noGrp="1"/>
+          </p:cNvSpPr>
+          <p:nvPr>
+            <p:ph idx="2" sz="half" type="body"/>
           </p:nvPr>
         </p:nvSpPr>
         <p:spPr/>
@@ -5336,81 +5714,138 @@
             </a:pPr>
             <a:r>
               <a:rPr b="1"/>
-              <a:t>5. Why wavelets, not Fourier</a:t>
-            </a:r>
-          </a:p>
+              <a:t>Motor &amp; control system</a:t>
+            </a:r>
+          </a:p>
+        </p:txBody>
+      </p:sp>
+      <p:pic>
+        <p:nvPicPr>
+          <p:cNvPr descr="../figures/fig_foc_block.png" id="0" name="Picture 1"/>
+          <p:cNvPicPr>
+            <a:picLocks noGrp="1" noChangeAspect="1"/>
+          </p:cNvPicPr>
+          <p:nvPr/>
+        </p:nvPicPr>
+        <p:blipFill>
+          <a:blip r:embed="rId2"/>
+          <a:stretch>
+            <a:fillRect/>
+          </a:stretch>
+        </p:blipFill>
+        <p:spPr bwMode="auto">
+          <a:xfrm>
+            <a:off x="3568700" y="1320800"/>
+            <a:ext cx="5105400" cy="1638300"/>
+          </a:xfrm>
+          <a:prstGeom prst="rect">
+            <a:avLst/>
+          </a:prstGeom>
+          <a:noFill/>
+          <a:ln w="9525">
+            <a:noFill/>
+            <a:headEnd/>
+            <a:tailEnd/>
+          </a:ln>
+        </p:spPr>
+      </p:pic>
+      <p:sp>
+        <p:nvSpPr>
+          <p:cNvPr id="1" name="TextBox 3"/>
+          <p:cNvSpPr txBox="1"/>
+          <p:nvPr>
+            <p:ph idx="1"/>
+          </p:nvPr>
+        </p:nvSpPr>
+        <p:spPr>
+          <a:xfrm>
+            <a:off x="3568700" y="4076700"/>
+            <a:ext cx="5105400" cy="508000"/>
+          </a:xfrm>
+          <a:prstGeom prst="rect">
+            <a:avLst/>
+          </a:prstGeom>
+          <a:noFill/>
+        </p:spPr>
+        <p:txBody>
+          <a:bodyPr/>
+          <a:lstStyle/>
+          <a:p>
+            <a:pPr lvl="0" indent="0" marL="0" algn="ctr">
+              <a:buNone/>
+            </a:pPr>
+            <a:r>
+              <a:rPr/>
+              <a:t>w:780</a:t>
+            </a:r>
+          </a:p>
+        </p:txBody>
+      </p:sp>
+      <p:sp>
+        <p:nvSpPr>
+          <p:cNvPr id="3" name="Content Placeholder 2"/>
+          <p:cNvSpPr>
+            <a:spLocks noGrp="1"/>
+          </p:cNvSpPr>
+          <p:nvPr>
+            <p:ph idx="1"/>
+          </p:nvPr>
+        </p:nvSpPr>
+        <p:spPr/>
+        <p:txBody>
+          <a:bodyPr/>
+          <a:lstStyle/>
           <a:p>
             <a:pPr lvl="0"/>
             <a:r>
               <a:rPr/>
-              <a:t>Fourier is </a:t>
-            </a:r>
-            <a:r>
-              <a:rPr b="1"/>
-              <a:t>blind to time</a:t>
-            </a:r>
-            <a:r>
-              <a:rPr/>
-              <a:t> — it can’t say </a:t>
+              <a:t>Stator (3-phase winding) + PM rotor; driven by an </a:t>
+            </a:r>
+            <a:r>
+              <a:rPr b="1"/>
+              <a:t>inverter</a:t>
+            </a:r>
+            <a:r>
+              <a:rPr/>
+              <a:t> under </a:t>
+            </a:r>
+            <a:r>
+              <a:rPr b="1"/>
+              <a:t>FOC</a:t>
+            </a:r>
+            <a:r>
+              <a:rPr/>
+              <a:t>.</a:t>
+            </a:r>
+          </a:p>
+          <a:p>
+            <a:pPr lvl="0"/>
+            <a:r>
+              <a:rPr/>
+              <a:t>The current loop </a:t>
+            </a:r>
+            <a:r>
+              <a:rPr b="1"/>
+              <a:t>rejects disturbances → it masks the fault in the current</a:t>
+            </a:r>
+            <a:r>
+              <a:rPr/>
+              <a:t>.</a:t>
+            </a:r>
+          </a:p>
+          <a:p>
+            <a:pPr lvl="0"/>
+            <a:r>
+              <a:rPr/>
+              <a:t>That is </a:t>
             </a:r>
             <a:r>
               <a:rPr i="1"/>
-              <a:t>when</a:t>
-            </a:r>
-            <a:r>
-              <a:rPr/>
-              <a:t> a frequency occurs.</a:t>
-            </a:r>
-          </a:p>
-          <a:p>
-            <a:pPr lvl="0"/>
-            <a:r>
-              <a:rPr/>
-              <a:t>Motor fault signals are </a:t>
-            </a:r>
-            <a:r>
-              <a:rPr b="1"/>
-              <a:t>non-stationary</a:t>
-            </a:r>
-            <a:r>
-              <a:rPr/>
-              <a:t> (transient, load-dependent).</a:t>
-            </a:r>
-          </a:p>
-          <a:p>
-            <a:pPr lvl="0"/>
-            <a:r>
-              <a:rPr/>
-              <a:t>Uncertainty principle: </a:t>
-            </a:r>
-            <a:r>
-              <a:rPr>
-                <a:latin typeface="Courier"/>
-              </a:rPr>
-              <a:t>Δt · Δf ≥ const</a:t>
-            </a:r>
-            <a:r>
-              <a:rPr/>
-              <a:t> — can’t have perfect time </a:t>
-            </a:r>
-            <a:r>
-              <a:rPr i="1"/>
-              <a:t>and</a:t>
-            </a:r>
-            <a:r>
-              <a:rPr/>
-              <a:t> frequency resolution.</a:t>
-            </a:r>
-          </a:p>
-          <a:p>
-            <a:pPr lvl="0"/>
-            <a:r>
-              <a:rPr b="1"/>
-              <a:t>Wavelets</a:t>
-            </a:r>
-            <a:r>
-              <a:rPr/>
-              <a:t> = short, localised waves → frequency-dependent resolution, ideal for transients.</a:t>
+              <a:t>why vibration detects inter-turn faults far better</a:t>
+            </a:r>
+            <a:r>
+              <a:rPr/>
+              <a:t> (our key result).</a:t>
             </a:r>
           </a:p>
         </p:txBody>
@@ -5439,12 +5874,12 @@
       </p:grpSpPr>
       <p:sp>
         <p:nvSpPr>
-          <p:cNvPr id="3" name="Content Placeholder 2"/>
-          <p:cNvSpPr>
-            <a:spLocks noGrp="1"/>
-          </p:cNvSpPr>
-          <p:nvPr>
-            <p:ph idx="1"/>
+          <p:cNvPr id="4" name="Text Placeholder 3"/>
+          <p:cNvSpPr>
+            <a:spLocks noGrp="1"/>
+          </p:cNvSpPr>
+          <p:nvPr>
+            <p:ph idx="2" sz="half" type="body"/>
           </p:nvPr>
         </p:nvSpPr>
         <p:spPr/>
@@ -5460,63 +5895,130 @@
             </a:pPr>
             <a:r>
               <a:rPr b="1"/>
-              <a:t>6. The CWT &amp; scalogram</a:t>
-            </a:r>
-          </a:p>
+              <a:t>PMSM vs its relatives</a:t>
+            </a:r>
+          </a:p>
+        </p:txBody>
+      </p:sp>
+      <p:pic>
+        <p:nvPicPr>
+          <p:cNvPr descr="../figures/fig_motor_comparison.png" id="0" name="Picture 1"/>
+          <p:cNvPicPr>
+            <a:picLocks noGrp="1" noChangeAspect="1"/>
+          </p:cNvPicPr>
+          <p:nvPr/>
+        </p:nvPicPr>
+        <p:blipFill>
+          <a:blip r:embed="rId2"/>
+          <a:stretch>
+            <a:fillRect/>
+          </a:stretch>
+        </p:blipFill>
+        <p:spPr bwMode="auto">
+          <a:xfrm>
+            <a:off x="3568700" y="1270000"/>
+            <a:ext cx="5105400" cy="1727200"/>
+          </a:xfrm>
+          <a:prstGeom prst="rect">
+            <a:avLst/>
+          </a:prstGeom>
+          <a:noFill/>
+          <a:ln w="9525">
+            <a:noFill/>
+            <a:headEnd/>
+            <a:tailEnd/>
+          </a:ln>
+        </p:spPr>
+      </p:pic>
+      <p:sp>
+        <p:nvSpPr>
+          <p:cNvPr id="1" name="TextBox 3"/>
+          <p:cNvSpPr txBox="1"/>
+          <p:nvPr>
+            <p:ph idx="1"/>
+          </p:nvPr>
+        </p:nvSpPr>
+        <p:spPr>
+          <a:xfrm>
+            <a:off x="3568700" y="4076700"/>
+            <a:ext cx="5105400" cy="508000"/>
+          </a:xfrm>
+          <a:prstGeom prst="rect">
+            <a:avLst/>
+          </a:prstGeom>
+          <a:noFill/>
+        </p:spPr>
+        <p:txBody>
+          <a:bodyPr/>
+          <a:lstStyle/>
+          <a:p>
+            <a:pPr lvl="0" indent="0" marL="0" algn="ctr">
+              <a:buNone/>
+            </a:pPr>
+            <a:r>
+              <a:rPr/>
+              <a:t>w:880</a:t>
+            </a:r>
+          </a:p>
+        </p:txBody>
+      </p:sp>
+      <p:sp>
+        <p:nvSpPr>
+          <p:cNvPr id="3" name="Content Placeholder 2"/>
+          <p:cNvSpPr>
+            <a:spLocks noGrp="1"/>
+          </p:cNvSpPr>
+          <p:nvPr>
+            <p:ph idx="1"/>
+          </p:nvPr>
+        </p:nvSpPr>
+        <p:spPr/>
+        <p:txBody>
+          <a:bodyPr/>
+          <a:lstStyle/>
           <a:p>
             <a:pPr lvl="0"/>
             <a:r>
               <a:rPr/>
-              <a:t>Scale the </a:t>
-            </a:r>
-            <a:r>
-              <a:rPr b="1"/>
-              <a:t>Morlet</a:t>
-            </a:r>
-            <a:r>
-              <a:rPr/>
-              <a:t> wavelet (frequency knob) and slide it (time knob).</a:t>
+              <a:t>vs </a:t>
+            </a:r>
+            <a:r>
+              <a:rPr b="1"/>
+              <a:t>PMDC</a:t>
+            </a:r>
+            <a:r>
+              <a:rPr/>
+              <a:t>: same easy torque control, but no brushes → less maintenance.</a:t>
             </a:r>
           </a:p>
           <a:p>
             <a:pPr lvl="0"/>
             <a:r>
               <a:rPr/>
-              <a:t>Each coefficient = </a:t>
-            </a:r>
-            <a:r>
-              <a:rPr b="1"/>
-              <a:t>similarity</a:t>
-            </a:r>
-            <a:r>
-              <a:rPr/>
-              <a:t> of the signal to that wave at that time.</a:t>
+              <a:t>vs </a:t>
+            </a:r>
+            <a:r>
+              <a:rPr b="1"/>
+              <a:t>BLDC</a:t>
+            </a:r>
+            <a:r>
+              <a:rPr/>
+              <a:t>: sinusoidal back-EMF + FOC → smoother torque, higher efficiency.</a:t>
             </a:r>
           </a:p>
           <a:p>
             <a:pPr lvl="0"/>
             <a:r>
-              <a:rPr b="1"/>
-              <a:t>Scalogram</a:t>
-            </a:r>
-            <a:r>
-              <a:rPr/>
-              <a:t> = colour image of energy vs. time (x) and frequency (y).</a:t>
-            </a:r>
-          </a:p>
-          <a:p>
-            <a:pPr lvl="0"/>
-            <a:r>
-              <a:rPr/>
-              <a:t>Bright bands &amp; side-bands = fault signatures the CNN can </a:t>
-            </a:r>
-            <a:r>
-              <a:rPr i="1"/>
-              <a:t>see</a:t>
-            </a:r>
-            <a:r>
-              <a:rPr/>
-              <a:t>.</a:t>
+              <a:rPr/>
+              <a:t>vs </a:t>
+            </a:r>
+            <a:r>
+              <a:rPr b="1"/>
+              <a:t>Induction</a:t>
+            </a:r>
+            <a:r>
+              <a:rPr/>
+              <a:t>: no rotor current/slip → higher efficiency &amp; torque density.</a:t>
             </a:r>
           </a:p>
         </p:txBody>
@@ -5566,14 +6068,14 @@
             </a:pPr>
             <a:r>
               <a:rPr b="1"/>
-              <a:t>7. Example scalograms (real KAIST data)</a:t>
+              <a:t>Detecting the fault — today vs this work</a:t>
             </a:r>
           </a:p>
         </p:txBody>
       </p:sp>
       <p:pic>
         <p:nvPicPr>
-          <p:cNvPr descr="../../results/example_scalograms_real.png" id="0" name="Picture 1"/>
+          <p:cNvPr descr="../figures/fig_detection_taxonomy.png" id="0" name="Picture 1"/>
           <p:cNvPicPr>
             <a:picLocks noGrp="1" noChangeAspect="1"/>
           </p:cNvPicPr>
@@ -5587,8 +6089,8 @@
         </p:blipFill>
         <p:spPr bwMode="auto">
           <a:xfrm>
-            <a:off x="3568700" y="1473200"/>
-            <a:ext cx="5105400" cy="1346200"/>
+            <a:off x="3568700" y="1130300"/>
+            <a:ext cx="5105400" cy="2006600"/>
           </a:xfrm>
           <a:prstGeom prst="rect">
             <a:avLst/>
@@ -5628,7 +6130,7 @@
             </a:pPr>
             <a:r>
               <a:rPr/>
-              <a:t>w:1000</a:t>
+              <a:t>w:820</a:t>
             </a:r>
           </a:p>
         </p:txBody>
@@ -5648,16 +6150,40 @@
           <a:bodyPr/>
           <a:lstStyle/>
           <a:p>
-            <a:pPr lvl="0" indent="0" marL="0">
-              <a:buNone/>
-            </a:pPr>
-            <a:r>
-              <a:rPr/>
-              <a:t>Inter-turn fault visibly </a:t>
-            </a:r>
-            <a:r>
-              <a:rPr b="1"/>
-              <a:t>enriches the vibration time–frequency content</a:t>
+            <a:pPr lvl="0"/>
+            <a:r>
+              <a:rPr/>
+              <a:t>Manual/offline (thermal, </a:t>
+            </a:r>
+            <a:r>
+              <a:rPr b="1"/>
+              <a:t>Megger</a:t>
+            </a:r>
+            <a:r>
+              <a:rPr/>
+              <a:t>, surge) → need shutdown, periodic.</a:t>
+            </a:r>
+          </a:p>
+          <a:p>
+            <a:pPr lvl="0"/>
+            <a:r>
+              <a:rPr/>
+              <a:t>Online MCSA/vibration FFT → fixed thresholds, fooled by load/speed.</a:t>
+            </a:r>
+          </a:p>
+          <a:p>
+            <a:pPr lvl="0"/>
+            <a:r>
+              <a:rPr b="1"/>
+              <a:t>CWT scalogram + CNN</a:t>
+            </a:r>
+            <a:r>
+              <a:rPr/>
+              <a:t> → learns features, robust, detects </a:t>
+            </a:r>
+            <a:r>
+              <a:rPr b="1"/>
+              <a:t>earlier</a:t>
             </a:r>
             <a:r>
               <a:rPr/>

--- a/docs/build/slides.pptx
+++ b/docs/build/slides.pptx
@@ -29,6 +29,11 @@
     <p:sldId id="277" r:id="rId23"/>
     <p:sldId id="278" r:id="rId24"/>
     <p:sldId id="279" r:id="rId25"/>
+    <p:sldId id="280" r:id="rId26"/>
+    <p:sldId id="281" r:id="rId27"/>
+    <p:sldId id="282" r:id="rId28"/>
+    <p:sldId id="283" r:id="rId29"/>
+    <p:sldId id="284" r:id="rId30"/>
   </p:sldIdLst>
   <p:sldSz cx="9144000" cy="5143500" type="screen16x9"/>
   <p:notesSz cx="6858000" cy="9144000"/>
@@ -3180,89 +3185,48 @@
           <a:bodyPr/>
           <a:lstStyle/>
           <a:p>
-            <a:pPr lvl="0" indent="0" marL="0">
-              <a:spcBef>
-                <a:spcPts val="3000"/>
-              </a:spcBef>
-              <a:buNone/>
-            </a:pPr>
-            <a:r>
-              <a:rPr b="1"/>
-              <a:t>5. Why wavelets, not Fourier</a:t>
-            </a:r>
-          </a:p>
-          <a:p>
             <a:pPr lvl="0"/>
             <a:r>
               <a:rPr/>
-              <a:t>Fourier is </a:t>
-            </a:r>
-            <a:r>
-              <a:rPr b="1"/>
-              <a:t>blind to time</a:t>
-            </a:r>
-            <a:r>
-              <a:rPr/>
-              <a:t> — it can’t say </a:t>
-            </a:r>
-            <a:r>
-              <a:rPr i="1"/>
-              <a:t>when</a:t>
-            </a:r>
-            <a:r>
-              <a:rPr/>
-              <a:t> a frequency occurs.</a:t>
+              <a:t>vs </a:t>
+            </a:r>
+            <a:r>
+              <a:rPr b="1"/>
+              <a:t>PMDC</a:t>
+            </a:r>
+            <a:r>
+              <a:rPr/>
+              <a:t>: same easy torque control, but no brushes → less maintenance.</a:t>
             </a:r>
           </a:p>
           <a:p>
             <a:pPr lvl="0"/>
             <a:r>
               <a:rPr/>
-              <a:t>Motor fault signals are </a:t>
-            </a:r>
-            <a:r>
-              <a:rPr b="1"/>
-              <a:t>non-stationary</a:t>
-            </a:r>
-            <a:r>
-              <a:rPr/>
-              <a:t> (transient, load-dependent).</a:t>
+              <a:t>vs </a:t>
+            </a:r>
+            <a:r>
+              <a:rPr b="1"/>
+              <a:t>BLDC</a:t>
+            </a:r>
+            <a:r>
+              <a:rPr/>
+              <a:t>: sinusoidal back-EMF + FOC → smoother torque, higher efficiency.</a:t>
             </a:r>
           </a:p>
           <a:p>
             <a:pPr lvl="0"/>
             <a:r>
               <a:rPr/>
-              <a:t>Uncertainty principle: </a:t>
-            </a:r>
-            <a:r>
-              <a:rPr>
-                <a:latin typeface="Courier"/>
-              </a:rPr>
-              <a:t>Δt · Δf ≥ const</a:t>
-            </a:r>
-            <a:r>
-              <a:rPr/>
-              <a:t> — can’t have perfect time </a:t>
-            </a:r>
-            <a:r>
-              <a:rPr i="1"/>
-              <a:t>and</a:t>
-            </a:r>
-            <a:r>
-              <a:rPr/>
-              <a:t> frequency resolution.</a:t>
-            </a:r>
-          </a:p>
-          <a:p>
-            <a:pPr lvl="0"/>
-            <a:r>
-              <a:rPr b="1"/>
-              <a:t>Wavelets</a:t>
-            </a:r>
-            <a:r>
-              <a:rPr/>
-              <a:t> = short, localised waves → frequency-dependent resolution, ideal for transients.</a:t>
+              <a:t>vs </a:t>
+            </a:r>
+            <a:r>
+              <a:rPr b="1"/>
+              <a:t>Induction</a:t>
+            </a:r>
+            <a:r>
+              <a:rPr/>
+              <a:t>: no rotor current/slip → higher efficiency &amp; torque density.</a:t>
             </a:r>
           </a:p>
         </p:txBody>
@@ -3291,12 +3255,12 @@
       </p:grpSpPr>
       <p:sp>
         <p:nvSpPr>
-          <p:cNvPr id="3" name="Content Placeholder 2"/>
-          <p:cNvSpPr>
-            <a:spLocks noGrp="1"/>
-          </p:cNvSpPr>
-          <p:nvPr>
-            <p:ph idx="1"/>
+          <p:cNvPr id="4" name="Text Placeholder 3"/>
+          <p:cNvSpPr>
+            <a:spLocks noGrp="1"/>
+          </p:cNvSpPr>
+          <p:nvPr>
+            <p:ph idx="2" sz="half" type="body"/>
           </p:nvPr>
         </p:nvSpPr>
         <p:spPr/>
@@ -3312,67 +3276,41 @@
             </a:pPr>
             <a:r>
               <a:rPr b="1"/>
-              <a:t>6. The CWT &amp; scalogram</a:t>
-            </a:r>
-          </a:p>
-          <a:p>
-            <a:pPr lvl="0"/>
-            <a:r>
-              <a:rPr/>
-              <a:t>Scale the </a:t>
-            </a:r>
-            <a:r>
-              <a:rPr b="1"/>
-              <a:t>Morlet</a:t>
-            </a:r>
-            <a:r>
-              <a:rPr/>
-              <a:t> wavelet (frequency knob) and slide it (time knob).</a:t>
-            </a:r>
-          </a:p>
-          <a:p>
-            <a:pPr lvl="0"/>
-            <a:r>
-              <a:rPr/>
-              <a:t>Each coefficient = </a:t>
-            </a:r>
-            <a:r>
-              <a:rPr b="1"/>
-              <a:t>similarity</a:t>
-            </a:r>
-            <a:r>
-              <a:rPr/>
-              <a:t> of the signal to that wave at that time.</a:t>
-            </a:r>
-          </a:p>
-          <a:p>
-            <a:pPr lvl="0"/>
-            <a:r>
-              <a:rPr b="1"/>
-              <a:t>Scalogram</a:t>
-            </a:r>
-            <a:r>
-              <a:rPr/>
-              <a:t> = colour image of energy vs. time (x) and frequency (y).</a:t>
-            </a:r>
-          </a:p>
-          <a:p>
-            <a:pPr lvl="0"/>
-            <a:r>
-              <a:rPr/>
-              <a:t>Bright bands &amp; side-bands = fault signatures the CNN can </a:t>
-            </a:r>
-            <a:r>
-              <a:rPr i="1"/>
-              <a:t>see</a:t>
-            </a:r>
-            <a:r>
-              <a:rPr/>
-              <a:t>.</a:t>
-            </a:r>
-          </a:p>
-        </p:txBody>
-      </p:sp>
+              <a:t>Detecting the fault — today vs this work</a:t>
+            </a:r>
+          </a:p>
+        </p:txBody>
+      </p:sp>
+      <p:pic>
+        <p:nvPicPr>
+          <p:cNvPr descr="../figures/fig_detection_taxonomy.png" id="0" name="Picture 1"/>
+          <p:cNvPicPr>
+            <a:picLocks noGrp="1" noChangeAspect="1"/>
+          </p:cNvPicPr>
+          <p:nvPr/>
+        </p:nvPicPr>
+        <p:blipFill>
+          <a:blip r:embed="rId2"/>
+          <a:stretch>
+            <a:fillRect/>
+          </a:stretch>
+        </p:blipFill>
+        <p:spPr bwMode="auto">
+          <a:xfrm>
+            <a:off x="3568700" y="1384300"/>
+            <a:ext cx="5105400" cy="2006600"/>
+          </a:xfrm>
+          <a:prstGeom prst="rect">
+            <a:avLst/>
+          </a:prstGeom>
+          <a:noFill/>
+          <a:ln w="9525">
+            <a:noFill/>
+            <a:headEnd/>
+            <a:tailEnd/>
+          </a:ln>
+        </p:spPr>
+      </p:pic>
     </p:spTree>
   </p:cSld>
 </p:sld>
@@ -3397,6 +3335,315 @@
       </p:grpSpPr>
       <p:sp>
         <p:nvSpPr>
+          <p:cNvPr id="3" name="Content Placeholder 2"/>
+          <p:cNvSpPr>
+            <a:spLocks noGrp="1"/>
+          </p:cNvSpPr>
+          <p:nvPr>
+            <p:ph idx="1"/>
+          </p:nvPr>
+        </p:nvSpPr>
+        <p:spPr/>
+        <p:txBody>
+          <a:bodyPr/>
+          <a:lstStyle/>
+          <a:p>
+            <a:pPr lvl="0"/>
+            <a:r>
+              <a:rPr/>
+              <a:t>Manual/offline (thermal, </a:t>
+            </a:r>
+            <a:r>
+              <a:rPr b="1"/>
+              <a:t>Megger</a:t>
+            </a:r>
+            <a:r>
+              <a:rPr/>
+              <a:t>, surge) → need shutdown, periodic.</a:t>
+            </a:r>
+          </a:p>
+          <a:p>
+            <a:pPr lvl="0"/>
+            <a:r>
+              <a:rPr/>
+              <a:t>Online MCSA/vibration FFT → fixed thresholds, fooled by load/speed.</a:t>
+            </a:r>
+          </a:p>
+          <a:p>
+            <a:pPr lvl="0"/>
+            <a:r>
+              <a:rPr b="1"/>
+              <a:t>CWT scalogram + CNN</a:t>
+            </a:r>
+            <a:r>
+              <a:rPr/>
+              <a:t> → learns features, robust, detects </a:t>
+            </a:r>
+            <a:r>
+              <a:rPr b="1"/>
+              <a:t>earlier</a:t>
+            </a:r>
+            <a:r>
+              <a:rPr/>
+              <a:t>.</a:t>
+            </a:r>
+          </a:p>
+        </p:txBody>
+      </p:sp>
+    </p:spTree>
+  </p:cSld>
+</p:sld>
+</file>
+
+<file path=ppt/slides/slide13.xml><?xml version="1.0" encoding="utf-8"?>
+<p:sld xmlns:a="http://schemas.openxmlformats.org/drawingml/2006/main" xmlns:r="http://schemas.openxmlformats.org/officeDocument/2006/relationships" xmlns:p="http://schemas.openxmlformats.org/presentationml/2006/main">
+  <p:cSld>
+    <p:spTree>
+      <p:nvGrpSpPr>
+        <p:cNvPr id="1" name=""/>
+        <p:cNvGrpSpPr/>
+        <p:nvPr/>
+      </p:nvGrpSpPr>
+      <p:grpSpPr>
+        <a:xfrm>
+          <a:off x="0" y="0"/>
+          <a:ext cx="0" cy="0"/>
+          <a:chOff x="0" y="0"/>
+          <a:chExt cx="0" cy="0"/>
+        </a:xfrm>
+      </p:grpSpPr>
+      <p:sp>
+        <p:nvSpPr>
+          <p:cNvPr id="3" name="Content Placeholder 2"/>
+          <p:cNvSpPr>
+            <a:spLocks noGrp="1"/>
+          </p:cNvSpPr>
+          <p:nvPr>
+            <p:ph idx="1"/>
+          </p:nvPr>
+        </p:nvSpPr>
+        <p:spPr/>
+        <p:txBody>
+          <a:bodyPr/>
+          <a:lstStyle/>
+          <a:p>
+            <a:pPr lvl="0" indent="0" marL="0">
+              <a:spcBef>
+                <a:spcPts val="3000"/>
+              </a:spcBef>
+              <a:buNone/>
+            </a:pPr>
+            <a:r>
+              <a:rPr b="1"/>
+              <a:t>5. Why wavelets, not Fourier</a:t>
+            </a:r>
+          </a:p>
+          <a:p>
+            <a:pPr lvl="0"/>
+            <a:r>
+              <a:rPr/>
+              <a:t>Fourier is </a:t>
+            </a:r>
+            <a:r>
+              <a:rPr b="1"/>
+              <a:t>blind to time</a:t>
+            </a:r>
+            <a:r>
+              <a:rPr/>
+              <a:t> — it can’t say </a:t>
+            </a:r>
+            <a:r>
+              <a:rPr i="1"/>
+              <a:t>when</a:t>
+            </a:r>
+            <a:r>
+              <a:rPr/>
+              <a:t> a frequency occurs.</a:t>
+            </a:r>
+          </a:p>
+          <a:p>
+            <a:pPr lvl="0"/>
+            <a:r>
+              <a:rPr/>
+              <a:t>Motor fault signals are </a:t>
+            </a:r>
+            <a:r>
+              <a:rPr b="1"/>
+              <a:t>non-stationary</a:t>
+            </a:r>
+            <a:r>
+              <a:rPr/>
+              <a:t> (transient, load-dependent).</a:t>
+            </a:r>
+          </a:p>
+          <a:p>
+            <a:pPr lvl="0"/>
+            <a:r>
+              <a:rPr/>
+              <a:t>Uncertainty principle: </a:t>
+            </a:r>
+            <a:r>
+              <a:rPr>
+                <a:latin typeface="Courier"/>
+              </a:rPr>
+              <a:t>Δt · Δf ≥ const</a:t>
+            </a:r>
+            <a:r>
+              <a:rPr/>
+              <a:t> — can’t have perfect time </a:t>
+            </a:r>
+            <a:r>
+              <a:rPr i="1"/>
+              <a:t>and</a:t>
+            </a:r>
+            <a:r>
+              <a:rPr/>
+              <a:t> frequency resolution.</a:t>
+            </a:r>
+          </a:p>
+          <a:p>
+            <a:pPr lvl="0"/>
+            <a:r>
+              <a:rPr b="1"/>
+              <a:t>Wavelets</a:t>
+            </a:r>
+            <a:r>
+              <a:rPr/>
+              <a:t> = short, localised waves → frequency-dependent resolution, ideal for transients.</a:t>
+            </a:r>
+          </a:p>
+        </p:txBody>
+      </p:sp>
+    </p:spTree>
+  </p:cSld>
+</p:sld>
+</file>
+
+<file path=ppt/slides/slide14.xml><?xml version="1.0" encoding="utf-8"?>
+<p:sld xmlns:a="http://schemas.openxmlformats.org/drawingml/2006/main" xmlns:r="http://schemas.openxmlformats.org/officeDocument/2006/relationships" xmlns:p="http://schemas.openxmlformats.org/presentationml/2006/main">
+  <p:cSld>
+    <p:spTree>
+      <p:nvGrpSpPr>
+        <p:cNvPr id="1" name=""/>
+        <p:cNvGrpSpPr/>
+        <p:nvPr/>
+      </p:nvGrpSpPr>
+      <p:grpSpPr>
+        <a:xfrm>
+          <a:off x="0" y="0"/>
+          <a:ext cx="0" cy="0"/>
+          <a:chOff x="0" y="0"/>
+          <a:chExt cx="0" cy="0"/>
+        </a:xfrm>
+      </p:grpSpPr>
+      <p:sp>
+        <p:nvSpPr>
+          <p:cNvPr id="3" name="Content Placeholder 2"/>
+          <p:cNvSpPr>
+            <a:spLocks noGrp="1"/>
+          </p:cNvSpPr>
+          <p:nvPr>
+            <p:ph idx="1"/>
+          </p:nvPr>
+        </p:nvSpPr>
+        <p:spPr/>
+        <p:txBody>
+          <a:bodyPr/>
+          <a:lstStyle/>
+          <a:p>
+            <a:pPr lvl="0" indent="0" marL="0">
+              <a:spcBef>
+                <a:spcPts val="3000"/>
+              </a:spcBef>
+              <a:buNone/>
+            </a:pPr>
+            <a:r>
+              <a:rPr b="1"/>
+              <a:t>6. The CWT &amp; scalogram</a:t>
+            </a:r>
+          </a:p>
+          <a:p>
+            <a:pPr lvl="0"/>
+            <a:r>
+              <a:rPr/>
+              <a:t>Scale the </a:t>
+            </a:r>
+            <a:r>
+              <a:rPr b="1"/>
+              <a:t>Morlet</a:t>
+            </a:r>
+            <a:r>
+              <a:rPr/>
+              <a:t> wavelet (frequency knob) and slide it (time knob).</a:t>
+            </a:r>
+          </a:p>
+          <a:p>
+            <a:pPr lvl="0"/>
+            <a:r>
+              <a:rPr/>
+              <a:t>Each coefficient = </a:t>
+            </a:r>
+            <a:r>
+              <a:rPr b="1"/>
+              <a:t>similarity</a:t>
+            </a:r>
+            <a:r>
+              <a:rPr/>
+              <a:t> of the signal to that wave at that time.</a:t>
+            </a:r>
+          </a:p>
+          <a:p>
+            <a:pPr lvl="0"/>
+            <a:r>
+              <a:rPr b="1"/>
+              <a:t>Scalogram</a:t>
+            </a:r>
+            <a:r>
+              <a:rPr/>
+              <a:t> = colour image of energy vs. time (x) and frequency (y).</a:t>
+            </a:r>
+          </a:p>
+          <a:p>
+            <a:pPr lvl="0"/>
+            <a:r>
+              <a:rPr/>
+              <a:t>Bright bands &amp; side-bands = fault signatures the CNN can </a:t>
+            </a:r>
+            <a:r>
+              <a:rPr i="1"/>
+              <a:t>see</a:t>
+            </a:r>
+            <a:r>
+              <a:rPr/>
+              <a:t>.</a:t>
+            </a:r>
+          </a:p>
+        </p:txBody>
+      </p:sp>
+    </p:spTree>
+  </p:cSld>
+</p:sld>
+</file>
+
+<file path=ppt/slides/slide15.xml><?xml version="1.0" encoding="utf-8"?>
+<p:sld xmlns:a="http://schemas.openxmlformats.org/drawingml/2006/main" xmlns:r="http://schemas.openxmlformats.org/officeDocument/2006/relationships" xmlns:p="http://schemas.openxmlformats.org/presentationml/2006/main">
+  <p:cSld>
+    <p:spTree>
+      <p:nvGrpSpPr>
+        <p:cNvPr id="1" name=""/>
+        <p:cNvGrpSpPr/>
+        <p:nvPr/>
+      </p:nvGrpSpPr>
+      <p:grpSpPr>
+        <a:xfrm>
+          <a:off x="0" y="0"/>
+          <a:ext cx="0" cy="0"/>
+          <a:chOff x="0" y="0"/>
+          <a:chExt cx="0" cy="0"/>
+        </a:xfrm>
+      </p:grpSpPr>
+      <p:sp>
+        <p:nvSpPr>
           <p:cNvPr id="4" name="Text Placeholder 3"/>
           <p:cNvSpPr>
             <a:spLocks noGrp="1"/>
@@ -3439,7 +3686,7 @@
         </p:blipFill>
         <p:spPr bwMode="auto">
           <a:xfrm>
-            <a:off x="3568700" y="1473200"/>
+            <a:off x="3568700" y="1727200"/>
             <a:ext cx="5105400" cy="1346200"/>
           </a:xfrm>
           <a:prstGeom prst="rect">
@@ -3453,77 +3700,67 @@
           </a:ln>
         </p:spPr>
       </p:pic>
-      <p:sp>
-        <p:nvSpPr>
-          <p:cNvPr id="1" name="TextBox 3"/>
-          <p:cNvSpPr txBox="1"/>
-          <p:nvPr>
-            <p:ph idx="1"/>
-          </p:nvPr>
-        </p:nvSpPr>
-        <p:spPr>
-          <a:xfrm>
-            <a:off x="3568700" y="4076700"/>
-            <a:ext cx="5105400" cy="508000"/>
-          </a:xfrm>
-          <a:prstGeom prst="rect">
-            <a:avLst/>
-          </a:prstGeom>
-          <a:noFill/>
-        </p:spPr>
-        <p:txBody>
-          <a:bodyPr/>
-          <a:lstStyle/>
-          <a:p>
-            <a:pPr lvl="0" indent="0" marL="0" algn="ctr">
-              <a:buNone/>
-            </a:pPr>
-            <a:r>
-              <a:rPr/>
-              <a:t>w:1000</a:t>
-            </a:r>
-          </a:p>
-        </p:txBody>
-      </p:sp>
-      <p:sp>
-        <p:nvSpPr>
-          <p:cNvPr id="3" name="Content Placeholder 2"/>
-          <p:cNvSpPr>
-            <a:spLocks noGrp="1"/>
-          </p:cNvSpPr>
-          <p:nvPr>
-            <p:ph idx="1"/>
-          </p:nvPr>
-        </p:nvSpPr>
-        <p:spPr/>
-        <p:txBody>
-          <a:bodyPr/>
-          <a:lstStyle/>
-          <a:p>
-            <a:pPr lvl="0" indent="0" marL="0">
-              <a:buNone/>
-            </a:pPr>
-            <a:r>
-              <a:rPr/>
-              <a:t>Inter-turn fault visibly </a:t>
-            </a:r>
-            <a:r>
-              <a:rPr b="1"/>
-              <a:t>enriches the vibration time–frequency content</a:t>
-            </a:r>
-            <a:r>
-              <a:rPr/>
-              <a:t>.</a:t>
-            </a:r>
-          </a:p>
-        </p:txBody>
-      </p:sp>
     </p:spTree>
   </p:cSld>
 </p:sld>
 </file>
 
-<file path=ppt/slides/slide13.xml><?xml version="1.0" encoding="utf-8"?>
+<file path=ppt/slides/slide16.xml><?xml version="1.0" encoding="utf-8"?>
+<p:sld xmlns:a="http://schemas.openxmlformats.org/drawingml/2006/main" xmlns:r="http://schemas.openxmlformats.org/officeDocument/2006/relationships" xmlns:p="http://schemas.openxmlformats.org/presentationml/2006/main">
+  <p:cSld>
+    <p:spTree>
+      <p:nvGrpSpPr>
+        <p:cNvPr id="1" name=""/>
+        <p:cNvGrpSpPr/>
+        <p:nvPr/>
+      </p:nvGrpSpPr>
+      <p:grpSpPr>
+        <a:xfrm>
+          <a:off x="0" y="0"/>
+          <a:ext cx="0" cy="0"/>
+          <a:chOff x="0" y="0"/>
+          <a:chExt cx="0" cy="0"/>
+        </a:xfrm>
+      </p:grpSpPr>
+      <p:sp>
+        <p:nvSpPr>
+          <p:cNvPr id="3" name="Content Placeholder 2"/>
+          <p:cNvSpPr>
+            <a:spLocks noGrp="1"/>
+          </p:cNvSpPr>
+          <p:nvPr>
+            <p:ph idx="1"/>
+          </p:nvPr>
+        </p:nvSpPr>
+        <p:spPr/>
+        <p:txBody>
+          <a:bodyPr/>
+          <a:lstStyle/>
+          <a:p>
+            <a:pPr lvl="0" indent="0" marL="0">
+              <a:buNone/>
+            </a:pPr>
+            <a:r>
+              <a:rPr/>
+              <a:t>Inter-turn fault visibly </a:t>
+            </a:r>
+            <a:r>
+              <a:rPr b="1"/>
+              <a:t>enriches the vibration time–frequency content</a:t>
+            </a:r>
+            <a:r>
+              <a:rPr/>
+              <a:t>.</a:t>
+            </a:r>
+          </a:p>
+        </p:txBody>
+      </p:sp>
+    </p:spTree>
+  </p:cSld>
+</p:sld>
+</file>
+
+<file path=ppt/slides/slide17.xml><?xml version="1.0" encoding="utf-8"?>
 <p:sld xmlns:a="http://schemas.openxmlformats.org/drawingml/2006/main" xmlns:r="http://schemas.openxmlformats.org/officeDocument/2006/relationships" xmlns:p="http://schemas.openxmlformats.org/presentationml/2006/main">
   <p:cSld>
     <p:spTree>
@@ -3801,7 +4038,7 @@
 </p:sld>
 </file>
 
-<file path=ppt/slides/slide14.xml><?xml version="1.0" encoding="utf-8"?>
+<file path=ppt/slides/slide18.xml><?xml version="1.0" encoding="utf-8"?>
 <p:sld xmlns:a="http://schemas.openxmlformats.org/drawingml/2006/main" xmlns:r="http://schemas.openxmlformats.org/officeDocument/2006/relationships" xmlns:p="http://schemas.openxmlformats.org/presentationml/2006/main">
   <p:cSld>
     <p:spTree>
@@ -3896,7 +4133,7 @@
 </p:sld>
 </file>
 
-<file path=ppt/slides/slide15.xml><?xml version="1.0" encoding="utf-8"?>
+<file path=ppt/slides/slide19.xml><?xml version="1.0" encoding="utf-8"?>
 <p:sld xmlns:a="http://schemas.openxmlformats.org/drawingml/2006/main" xmlns:r="http://schemas.openxmlformats.org/officeDocument/2006/relationships" xmlns:p="http://schemas.openxmlformats.org/presentationml/2006/main">
   <p:cSld>
     <p:spTree>
@@ -4018,7 +4255,7 @@
 </p:sld>
 </file>
 
-<file path=ppt/slides/slide16.xml><?xml version="1.0" encoding="utf-8"?>
+<file path=ppt/slides/slide2.xml><?xml version="1.0" encoding="utf-8"?>
 <p:sld xmlns:a="http://schemas.openxmlformats.org/drawingml/2006/main" xmlns:r="http://schemas.openxmlformats.org/officeDocument/2006/relationships" xmlns:p="http://schemas.openxmlformats.org/presentationml/2006/main">
   <p:cSld>
     <p:spTree>
@@ -4037,6 +4274,137 @@
       </p:grpSpPr>
       <p:sp>
         <p:nvSpPr>
+          <p:cNvPr id="2" name="Title 1"/>
+          <p:cNvSpPr>
+            <a:spLocks noGrp="1"/>
+          </p:cNvSpPr>
+          <p:nvPr>
+            <p:ph type="title"/>
+          </p:nvPr>
+        </p:nvSpPr>
+        <p:spPr/>
+        <p:txBody>
+          <a:bodyPr/>
+          <a:lstStyle/>
+          <a:p>
+            <a:pPr lvl="0" indent="0" marL="0">
+              <a:buNone/>
+            </a:pPr>
+            <a:r>
+              <a:rPr/>
+              <a:t>PMSM Fault Diagnosis using Wavelet Scalograms + CNN</a:t>
+            </a:r>
+          </a:p>
+        </p:txBody>
+      </p:sp>
+      <p:sp>
+        <p:nvSpPr>
+          <p:cNvPr id="3" name="Content Placeholder 2"/>
+          <p:cNvSpPr>
+            <a:spLocks noGrp="1"/>
+          </p:cNvSpPr>
+          <p:nvPr>
+            <p:ph idx="1"/>
+          </p:nvPr>
+        </p:nvSpPr>
+        <p:spPr/>
+        <p:txBody>
+          <a:bodyPr/>
+          <a:lstStyle/>
+          <a:p>
+            <a:pPr lvl="0" indent="0" marL="0">
+              <a:buNone/>
+            </a:pPr>
+            <a:r>
+              <a:rPr b="1"/>
+              <a:t>«University Name — Faculty»</a:t>
+            </a:r>
+            <a:r>
+              <a:rPr/>
+              <a:t> · </a:t>
+            </a:r>
+            <a:r>
+              <a:rPr b="1"/>
+              <a:t>«Department / Program»</a:t>
+            </a:r>
+          </a:p>
+          <a:p>
+            <a:pPr lvl="0" indent="0" marL="0">
+              <a:buNone/>
+            </a:pPr>
+            <a:r>
+              <a:rPr/>
+              <a:t>Students: </a:t>
+            </a:r>
+            <a:r>
+              <a:rPr b="1"/>
+              <a:t>Mulham Fetna</a:t>
+            </a:r>
+            <a:r>
+              <a:rPr/>
+              <a:t> · </a:t>
+            </a:r>
+            <a:r>
+              <a:rPr b="1"/>
+              <a:t>Mohammad Zein Qabbani</a:t>
+            </a:r>
+          </a:p>
+          <a:p>
+            <a:pPr lvl="0" indent="0" marL="0">
+              <a:buNone/>
+            </a:pPr>
+            <a:r>
+              <a:rPr/>
+              <a:t>Supervisor: </a:t>
+            </a:r>
+            <a:r>
+              <a:rPr b="1"/>
+              <a:t>«Dr. Supervisor Name»</a:t>
+            </a:r>
+            <a:r>
+              <a:rPr/>
+              <a:t> · Academic year: </a:t>
+            </a:r>
+            <a:r>
+              <a:rPr b="1"/>
+              <a:t>«2025–2026»</a:t>
+            </a:r>
+          </a:p>
+          <a:p>
+            <a:pPr lvl="0" indent="0" marL="0">
+              <a:buNone/>
+            </a:pPr>
+            <a:r>
+              <a:rPr i="1"/>
+              <a:t>Research seminar — CNN classification of PMSM operating states from time–frequency images</a:t>
+            </a:r>
+          </a:p>
+        </p:txBody>
+      </p:sp>
+    </p:spTree>
+  </p:cSld>
+</p:sld>
+</file>
+
+<file path=ppt/slides/slide20.xml><?xml version="1.0" encoding="utf-8"?>
+<p:sld xmlns:a="http://schemas.openxmlformats.org/drawingml/2006/main" xmlns:r="http://schemas.openxmlformats.org/officeDocument/2006/relationships" xmlns:p="http://schemas.openxmlformats.org/presentationml/2006/main">
+  <p:cSld>
+    <p:spTree>
+      <p:nvGrpSpPr>
+        <p:cNvPr id="1" name=""/>
+        <p:cNvGrpSpPr/>
+        <p:nvPr/>
+      </p:nvGrpSpPr>
+      <p:grpSpPr>
+        <a:xfrm>
+          <a:off x="0" y="0"/>
+          <a:ext cx="0" cy="0"/>
+          <a:chOff x="0" y="0"/>
+          <a:chExt cx="0" cy="0"/>
+        </a:xfrm>
+      </p:grpSpPr>
+      <p:sp>
+        <p:nvSpPr>
           <p:cNvPr id="3" name="Content Placeholder 2"/>
           <p:cNvSpPr>
             <a:spLocks noGrp="1"/>
@@ -4099,7 +4467,7 @@
 </p:sld>
 </file>
 
-<file path=ppt/slides/slide17.xml><?xml version="1.0" encoding="utf-8"?>
+<file path=ppt/slides/slide21.xml><?xml version="1.0" encoding="utf-8"?>
 <p:sld xmlns:a="http://schemas.openxmlformats.org/drawingml/2006/main" xmlns:r="http://schemas.openxmlformats.org/officeDocument/2006/relationships" xmlns:p="http://schemas.openxmlformats.org/presentationml/2006/main">
   <p:cSld>
     <p:spTree>
@@ -4493,505 +4861,6 @@
 </p:sld>
 </file>
 
-<file path=ppt/slides/slide18.xml><?xml version="1.0" encoding="utf-8"?>
-<p:sld xmlns:a="http://schemas.openxmlformats.org/drawingml/2006/main" xmlns:r="http://schemas.openxmlformats.org/officeDocument/2006/relationships" xmlns:p="http://schemas.openxmlformats.org/presentationml/2006/main">
-  <p:cSld>
-    <p:spTree>
-      <p:nvGrpSpPr>
-        <p:cNvPr id="1" name=""/>
-        <p:cNvGrpSpPr/>
-        <p:nvPr/>
-      </p:nvGrpSpPr>
-      <p:grpSpPr>
-        <a:xfrm>
-          <a:off x="0" y="0"/>
-          <a:ext cx="0" cy="0"/>
-          <a:chOff x="0" y="0"/>
-          <a:chExt cx="0" cy="0"/>
-        </a:xfrm>
-      </p:grpSpPr>
-      <p:sp>
-        <p:nvSpPr>
-          <p:cNvPr id="3" name="Content Placeholder 2"/>
-          <p:cNvSpPr>
-            <a:spLocks noGrp="1"/>
-          </p:cNvSpPr>
-          <p:nvPr>
-            <p:ph idx="1"/>
-          </p:nvPr>
-        </p:nvSpPr>
-        <p:spPr/>
-        <p:txBody>
-          <a:bodyPr/>
-          <a:lstStyle/>
-          <a:p>
-            <a:pPr lvl="0" indent="0" marL="0">
-              <a:buNone/>
-            </a:pPr>
-            <a:r>
-              <a:rPr/>
-              <a:t>Held-out recordings, Healthy vs Inter-turn.</a:t>
-            </a:r>
-          </a:p>
-        </p:txBody>
-      </p:sp>
-    </p:spTree>
-  </p:cSld>
-</p:sld>
-</file>
-
-<file path=ppt/slides/slide19.xml><?xml version="1.0" encoding="utf-8"?>
-<p:sld xmlns:a="http://schemas.openxmlformats.org/drawingml/2006/main" xmlns:r="http://schemas.openxmlformats.org/officeDocument/2006/relationships" xmlns:p="http://schemas.openxmlformats.org/presentationml/2006/main">
-  <p:cSld>
-    <p:spTree>
-      <p:nvGrpSpPr>
-        <p:cNvPr id="1" name=""/>
-        <p:cNvGrpSpPr/>
-        <p:nvPr/>
-      </p:nvGrpSpPr>
-      <p:grpSpPr>
-        <a:xfrm>
-          <a:off x="0" y="0"/>
-          <a:ext cx="0" cy="0"/>
-          <a:chOff x="0" y="0"/>
-          <a:chExt cx="0" cy="0"/>
-        </a:xfrm>
-      </p:grpSpPr>
-      <p:sp>
-        <p:nvSpPr>
-          <p:cNvPr id="4" name="Text Placeholder 3"/>
-          <p:cNvSpPr>
-            <a:spLocks noGrp="1"/>
-          </p:cNvSpPr>
-          <p:nvPr>
-            <p:ph idx="2" sz="half" type="body"/>
-          </p:nvPr>
-        </p:nvSpPr>
-        <p:spPr/>
-        <p:txBody>
-          <a:bodyPr/>
-          <a:lstStyle/>
-          <a:p>
-            <a:pPr lvl="0" indent="0" marL="0">
-              <a:spcBef>
-                <a:spcPts val="3000"/>
-              </a:spcBef>
-              <a:buNone/>
-            </a:pPr>
-            <a:r>
-              <a:rPr b="1"/>
-              <a:t>13. Confusion matrices</a:t>
-            </a:r>
-          </a:p>
-        </p:txBody>
-      </p:sp>
-      <p:pic>
-        <p:nvPicPr>
-          <p:cNvPr descr="../../results/confusion_real_2class.png" id="0" name="Picture 1"/>
-          <p:cNvPicPr>
-            <a:picLocks noGrp="1" noChangeAspect="1"/>
-          </p:cNvPicPr>
-          <p:nvPr/>
-        </p:nvPicPr>
-        <p:blipFill>
-          <a:blip r:embed="rId2"/>
-          <a:stretch>
-            <a:fillRect/>
-          </a:stretch>
-        </p:blipFill>
-        <p:spPr bwMode="auto">
-          <a:xfrm>
-            <a:off x="3568700" y="876300"/>
-            <a:ext cx="5105400" cy="2540000"/>
-          </a:xfrm>
-          <a:prstGeom prst="rect">
-            <a:avLst/>
-          </a:prstGeom>
-          <a:noFill/>
-          <a:ln w="9525">
-            <a:noFill/>
-            <a:headEnd/>
-            <a:tailEnd/>
-          </a:ln>
-        </p:spPr>
-      </p:pic>
-      <p:sp>
-        <p:nvSpPr>
-          <p:cNvPr id="1" name="TextBox 3"/>
-          <p:cNvSpPr txBox="1"/>
-          <p:nvPr>
-            <p:ph idx="1"/>
-          </p:nvPr>
-        </p:nvSpPr>
-        <p:spPr>
-          <a:xfrm>
-            <a:off x="3568700" y="4076700"/>
-            <a:ext cx="5105400" cy="508000"/>
-          </a:xfrm>
-          <a:prstGeom prst="rect">
-            <a:avLst/>
-          </a:prstGeom>
-          <a:noFill/>
-        </p:spPr>
-        <p:txBody>
-          <a:bodyPr/>
-          <a:lstStyle/>
-          <a:p>
-            <a:pPr lvl="0" indent="0" marL="0" algn="ctr">
-              <a:buNone/>
-            </a:pPr>
-            <a:r>
-              <a:rPr/>
-              <a:t>w:900</a:t>
-            </a:r>
-          </a:p>
-        </p:txBody>
-      </p:sp>
-      <p:sp>
-        <p:nvSpPr>
-          <p:cNvPr id="3" name="Content Placeholder 2"/>
-          <p:cNvSpPr>
-            <a:spLocks noGrp="1"/>
-          </p:cNvSpPr>
-          <p:nvPr>
-            <p:ph idx="1"/>
-          </p:nvPr>
-        </p:nvSpPr>
-        <p:spPr/>
-        <p:txBody>
-          <a:bodyPr/>
-          <a:lstStyle/>
-          <a:p>
-            <a:pPr lvl="0" indent="0" marL="0">
-              <a:buNone/>
-            </a:pPr>
-            <a:r>
-              <a:rPr/>
-              <a:t>Vibration is perfect; current misses most faults; fusion is in between.</a:t>
-            </a:r>
-          </a:p>
-        </p:txBody>
-      </p:sp>
-    </p:spTree>
-  </p:cSld>
-</p:sld>
-</file>
-
-<file path=ppt/slides/slide2.xml><?xml version="1.0" encoding="utf-8"?>
-<p:sld xmlns:a="http://schemas.openxmlformats.org/drawingml/2006/main" xmlns:r="http://schemas.openxmlformats.org/officeDocument/2006/relationships" xmlns:p="http://schemas.openxmlformats.org/presentationml/2006/main">
-  <p:cSld>
-    <p:spTree>
-      <p:nvGrpSpPr>
-        <p:cNvPr id="1" name=""/>
-        <p:cNvGrpSpPr/>
-        <p:nvPr/>
-      </p:nvGrpSpPr>
-      <p:grpSpPr>
-        <a:xfrm>
-          <a:off x="0" y="0"/>
-          <a:ext cx="0" cy="0"/>
-          <a:chOff x="0" y="0"/>
-          <a:chExt cx="0" cy="0"/>
-        </a:xfrm>
-      </p:grpSpPr>
-      <p:sp>
-        <p:nvSpPr>
-          <p:cNvPr id="2" name="Title 1"/>
-          <p:cNvSpPr>
-            <a:spLocks noGrp="1"/>
-          </p:cNvSpPr>
-          <p:nvPr>
-            <p:ph type="title"/>
-          </p:nvPr>
-        </p:nvSpPr>
-        <p:spPr/>
-        <p:txBody>
-          <a:bodyPr/>
-          <a:lstStyle/>
-          <a:p>
-            <a:pPr lvl="0" indent="0" marL="0">
-              <a:buNone/>
-            </a:pPr>
-            <a:r>
-              <a:rPr/>
-              <a:t>PMSM Fault Diagnosis using Wavelet Scalograms + CNN</a:t>
-            </a:r>
-          </a:p>
-        </p:txBody>
-      </p:sp>
-      <p:sp>
-        <p:nvSpPr>
-          <p:cNvPr id="3" name="Content Placeholder 2"/>
-          <p:cNvSpPr>
-            <a:spLocks noGrp="1"/>
-          </p:cNvSpPr>
-          <p:nvPr>
-            <p:ph idx="1"/>
-          </p:nvPr>
-        </p:nvSpPr>
-        <p:spPr/>
-        <p:txBody>
-          <a:bodyPr/>
-          <a:lstStyle/>
-          <a:p>
-            <a:pPr lvl="0" indent="0" marL="0">
-              <a:buNone/>
-            </a:pPr>
-            <a:r>
-              <a:rPr b="1"/>
-              <a:t>«University Name — Faculty»</a:t>
-            </a:r>
-            <a:r>
-              <a:rPr/>
-              <a:t> · </a:t>
-            </a:r>
-            <a:r>
-              <a:rPr b="1"/>
-              <a:t>«Department / Program»</a:t>
-            </a:r>
-          </a:p>
-          <a:p>
-            <a:pPr lvl="0" indent="0" marL="0">
-              <a:buNone/>
-            </a:pPr>
-            <a:r>
-              <a:rPr/>
-              <a:t>Students: </a:t>
-            </a:r>
-            <a:r>
-              <a:rPr b="1"/>
-              <a:t>Mulham Fetna</a:t>
-            </a:r>
-            <a:r>
-              <a:rPr/>
-              <a:t> · </a:t>
-            </a:r>
-            <a:r>
-              <a:rPr b="1"/>
-              <a:t>Mohammad Zein Qabbani</a:t>
-            </a:r>
-          </a:p>
-          <a:p>
-            <a:pPr lvl="0" indent="0" marL="0">
-              <a:buNone/>
-            </a:pPr>
-            <a:r>
-              <a:rPr/>
-              <a:t>Supervisor: </a:t>
-            </a:r>
-            <a:r>
-              <a:rPr b="1"/>
-              <a:t>«Dr. Supervisor Name»</a:t>
-            </a:r>
-            <a:r>
-              <a:rPr/>
-              <a:t> · Academic year: </a:t>
-            </a:r>
-            <a:r>
-              <a:rPr b="1"/>
-              <a:t>«2025–2026»</a:t>
-            </a:r>
-          </a:p>
-          <a:p>
-            <a:pPr lvl="0" indent="0" marL="0">
-              <a:buNone/>
-            </a:pPr>
-            <a:r>
-              <a:rPr i="1"/>
-              <a:t>Research seminar — CNN classification of PMSM operating states from time–frequency images</a:t>
-            </a:r>
-          </a:p>
-        </p:txBody>
-      </p:sp>
-    </p:spTree>
-  </p:cSld>
-</p:sld>
-</file>
-
-<file path=ppt/slides/slide20.xml><?xml version="1.0" encoding="utf-8"?>
-<p:sld xmlns:a="http://schemas.openxmlformats.org/drawingml/2006/main" xmlns:r="http://schemas.openxmlformats.org/officeDocument/2006/relationships" xmlns:p="http://schemas.openxmlformats.org/presentationml/2006/main">
-  <p:cSld>
-    <p:spTree>
-      <p:nvGrpSpPr>
-        <p:cNvPr id="1" name=""/>
-        <p:cNvGrpSpPr/>
-        <p:nvPr/>
-      </p:nvGrpSpPr>
-      <p:grpSpPr>
-        <a:xfrm>
-          <a:off x="0" y="0"/>
-          <a:ext cx="0" cy="0"/>
-          <a:chOff x="0" y="0"/>
-          <a:chExt cx="0" cy="0"/>
-        </a:xfrm>
-      </p:grpSpPr>
-      <p:sp>
-        <p:nvSpPr>
-          <p:cNvPr id="3" name="Content Placeholder 2"/>
-          <p:cNvSpPr>
-            <a:spLocks noGrp="1"/>
-          </p:cNvSpPr>
-          <p:nvPr>
-            <p:ph idx="1"/>
-          </p:nvPr>
-        </p:nvSpPr>
-        <p:spPr/>
-        <p:txBody>
-          <a:bodyPr/>
-          <a:lstStyle/>
-          <a:p>
-            <a:pPr lvl="0" indent="0" marL="0">
-              <a:spcBef>
-                <a:spcPts val="3000"/>
-              </a:spcBef>
-              <a:buNone/>
-            </a:pPr>
-            <a:r>
-              <a:rPr b="1"/>
-              <a:t>14. Analysis</a:t>
-            </a:r>
-          </a:p>
-          <a:p>
-            <a:pPr lvl="0"/>
-            <a:r>
-              <a:rPr b="1"/>
-              <a:t>Vibration ≫ current</a:t>
-            </a:r>
-            <a:r>
-              <a:rPr/>
-              <a:t> for inter-turn detection — physically expected (vibration responds directly; FOC suppresses current signatures).</a:t>
-            </a:r>
-          </a:p>
-          <a:p>
-            <a:pPr lvl="0"/>
-            <a:r>
-              <a:rPr b="1"/>
-              <a:t>Fusion</a:t>
-            </a:r>
-            <a:r>
-              <a:rPr/>
-              <a:t> beats current but not vibration alone on this small data.</a:t>
-            </a:r>
-          </a:p>
-          <a:p>
-            <a:pPr lvl="0"/>
-            <a:r>
-              <a:rPr/>
-              <a:t>Right </a:t>
-            </a:r>
-            <a:r>
-              <a:rPr b="1"/>
-              <a:t>metric matters</a:t>
-            </a:r>
-            <a:r>
-              <a:rPr/>
-              <a:t>: balanced accuracy exposed the majority-class collapse that raw accuracy hid.</a:t>
-            </a:r>
-          </a:p>
-        </p:txBody>
-      </p:sp>
-    </p:spTree>
-  </p:cSld>
-</p:sld>
-</file>
-
-<file path=ppt/slides/slide21.xml><?xml version="1.0" encoding="utf-8"?>
-<p:sld xmlns:a="http://schemas.openxmlformats.org/drawingml/2006/main" xmlns:r="http://schemas.openxmlformats.org/officeDocument/2006/relationships" xmlns:p="http://schemas.openxmlformats.org/presentationml/2006/main">
-  <p:cSld>
-    <p:spTree>
-      <p:nvGrpSpPr>
-        <p:cNvPr id="1" name=""/>
-        <p:cNvGrpSpPr/>
-        <p:nvPr/>
-      </p:nvGrpSpPr>
-      <p:grpSpPr>
-        <a:xfrm>
-          <a:off x="0" y="0"/>
-          <a:ext cx="0" cy="0"/>
-          <a:chOff x="0" y="0"/>
-          <a:chExt cx="0" cy="0"/>
-        </a:xfrm>
-      </p:grpSpPr>
-      <p:sp>
-        <p:nvSpPr>
-          <p:cNvPr id="3" name="Content Placeholder 2"/>
-          <p:cNvSpPr>
-            <a:spLocks noGrp="1"/>
-          </p:cNvSpPr>
-          <p:nvPr>
-            <p:ph idx="1"/>
-          </p:nvPr>
-        </p:nvSpPr>
-        <p:spPr/>
-        <p:txBody>
-          <a:bodyPr/>
-          <a:lstStyle/>
-          <a:p>
-            <a:pPr lvl="0" indent="0" marL="0">
-              <a:spcBef>
-                <a:spcPts val="3000"/>
-              </a:spcBef>
-              <a:buNone/>
-            </a:pPr>
-            <a:r>
-              <a:rPr b="1"/>
-              <a:t>15. Improvement experiments</a:t>
-            </a:r>
-          </a:p>
-          <a:p>
-            <a:pPr lvl="0"/>
-            <a:r>
-              <a:rPr b="1"/>
-              <a:t>Balancing</a:t>
-            </a:r>
-            <a:r>
-              <a:rPr/>
-              <a:t> removes the majority-class collapse (current healthy recall 0.00 → 1.00).</a:t>
-            </a:r>
-          </a:p>
-          <a:p>
-            <a:pPr lvl="0"/>
-            <a:r>
-              <a:rPr b="1"/>
-              <a:t>Image size</a:t>
-            </a:r>
-            <a:r>
-              <a:rPr/>
-              <a:t> &amp; </a:t>
-            </a:r>
-            <a:r>
-              <a:rPr b="1"/>
-              <a:t>training-set size</a:t>
-            </a:r>
-            <a:r>
-              <a:rPr/>
-              <a:t> studied (see </a:t>
-            </a:r>
-            <a:r>
-              <a:rPr>
-                <a:latin typeface="Courier"/>
-              </a:rPr>
-              <a:t>docs/experiments.md</a:t>
-            </a:r>
-            <a:r>
-              <a:rPr/>
-              <a:t>).</a:t>
-            </a:r>
-          </a:p>
-          <a:p>
-            <a:pPr lvl="0"/>
-            <a:r>
-              <a:rPr/>
-              <a:t>Overfitting controlled by dropout, global average pooling, augmentation and early stopping.</a:t>
-            </a:r>
-          </a:p>
-        </p:txBody>
-      </p:sp>
-    </p:spTree>
-  </p:cSld>
-</p:sld>
-</file>
-
 <file path=ppt/slides/slide22.xml><?xml version="1.0" encoding="utf-8"?>
 <p:sld xmlns:a="http://schemas.openxmlformats.org/drawingml/2006/main" xmlns:r="http://schemas.openxmlformats.org/officeDocument/2006/relationships" xmlns:p="http://schemas.openxmlformats.org/presentationml/2006/main">
   <p:cSld>
@@ -5025,51 +4894,11 @@
           <a:lstStyle/>
           <a:p>
             <a:pPr lvl="0" indent="0" marL="0">
-              <a:spcBef>
-                <a:spcPts val="3000"/>
-              </a:spcBef>
               <a:buNone/>
             </a:pPr>
             <a:r>
-              <a:rPr b="1"/>
-              <a:t>16. Limitations</a:t>
-            </a:r>
-          </a:p>
-          <a:p>
-            <a:pPr lvl="0"/>
-            <a:r>
-              <a:rPr/>
-              <a:t>Only </a:t>
-            </a:r>
-            <a:r>
-              <a:rPr b="1"/>
-              <a:t>4 distinct healthy recordings</a:t>
-            </a:r>
-            <a:r>
-              <a:rPr/>
-              <a:t> → perfect vibration score can’t yet exclude a </a:t>
-            </a:r>
-            <a:r>
-              <a:rPr i="1"/>
-              <a:t>recording-identity</a:t>
-            </a:r>
-            <a:r>
-              <a:rPr/>
-              <a:t> shortcut.</a:t>
-            </a:r>
-          </a:p>
-          <a:p>
-            <a:pPr lvl="0"/>
-            <a:r>
-              <a:rPr/>
-              <a:t>Demagnetization / Overload only synthetic.</a:t>
-            </a:r>
-          </a:p>
-          <a:p>
-            <a:pPr lvl="0"/>
-            <a:r>
-              <a:rPr/>
-              <a:t>Fusion comparison indicative, not strictly controlled.</a:t>
+              <a:rPr/>
+              <a:t>Held-out recordings, Healthy vs Inter-turn.</a:t>
             </a:r>
           </a:p>
         </p:txBody>
@@ -5098,12 +4927,12 @@
       </p:grpSpPr>
       <p:sp>
         <p:nvSpPr>
-          <p:cNvPr id="3" name="Content Placeholder 2"/>
-          <p:cNvSpPr>
-            <a:spLocks noGrp="1"/>
-          </p:cNvSpPr>
-          <p:nvPr>
-            <p:ph idx="1"/>
+          <p:cNvPr id="4" name="Text Placeholder 3"/>
+          <p:cNvSpPr>
+            <a:spLocks noGrp="1"/>
+          </p:cNvSpPr>
+          <p:nvPr>
+            <p:ph idx="2" sz="half" type="body"/>
           </p:nvPr>
         </p:nvSpPr>
         <p:spPr/>
@@ -5119,33 +4948,41 @@
             </a:pPr>
             <a:r>
               <a:rPr b="1"/>
-              <a:t>17. Conclusions &amp; future work</a:t>
-            </a:r>
-          </a:p>
-          <a:p>
-            <a:pPr lvl="0"/>
-            <a:r>
-              <a:rPr/>
-              <a:t>A reproducible scalogram + CNN pipeline detects inter-turn PMSM faults; </a:t>
-            </a:r>
-            <a:r>
-              <a:rPr b="1"/>
-              <a:t>vibration reaches balanced accuracy 1.00</a:t>
-            </a:r>
-            <a:r>
-              <a:rPr/>
-              <a:t> on held-out recordings.</a:t>
-            </a:r>
-          </a:p>
-          <a:p>
-            <a:pPr lvl="0"/>
-            <a:r>
-              <a:rPr/>
-              <a:t>Future: more independent recordings; paired multi-channel fusion; severity-aware targets; explainability (Grad-CAM); on-line deployment in the drive.</a:t>
-            </a:r>
-          </a:p>
-        </p:txBody>
-      </p:sp>
+              <a:t>13. Confusion matrices</a:t>
+            </a:r>
+          </a:p>
+        </p:txBody>
+      </p:sp>
+      <p:pic>
+        <p:nvPicPr>
+          <p:cNvPr descr="../../results/confusion_real_2class.png" id="0" name="Picture 1"/>
+          <p:cNvPicPr>
+            <a:picLocks noGrp="1" noChangeAspect="1"/>
+          </p:cNvPicPr>
+          <p:nvPr/>
+        </p:nvPicPr>
+        <p:blipFill>
+          <a:blip r:embed="rId2"/>
+          <a:stretch>
+            <a:fillRect/>
+          </a:stretch>
+        </p:blipFill>
+        <p:spPr bwMode="auto">
+          <a:xfrm>
+            <a:off x="3568700" y="1130300"/>
+            <a:ext cx="5105400" cy="2540000"/>
+          </a:xfrm>
+          <a:prstGeom prst="rect">
+            <a:avLst/>
+          </a:prstGeom>
+          <a:noFill/>
+          <a:ln w="9525">
+            <a:noFill/>
+            <a:headEnd/>
+            <a:tailEnd/>
+          </a:ln>
+        </p:spPr>
+      </p:pic>
     </p:spTree>
   </p:cSld>
 </p:sld>
@@ -5170,6 +5007,396 @@
       </p:grpSpPr>
       <p:sp>
         <p:nvSpPr>
+          <p:cNvPr id="3" name="Content Placeholder 2"/>
+          <p:cNvSpPr>
+            <a:spLocks noGrp="1"/>
+          </p:cNvSpPr>
+          <p:nvPr>
+            <p:ph idx="1"/>
+          </p:nvPr>
+        </p:nvSpPr>
+        <p:spPr/>
+        <p:txBody>
+          <a:bodyPr/>
+          <a:lstStyle/>
+          <a:p>
+            <a:pPr lvl="0" indent="0" marL="0">
+              <a:buNone/>
+            </a:pPr>
+            <a:r>
+              <a:rPr/>
+              <a:t>Vibration is perfect; current misses most faults; fusion is in between.</a:t>
+            </a:r>
+          </a:p>
+        </p:txBody>
+      </p:sp>
+    </p:spTree>
+  </p:cSld>
+</p:sld>
+</file>
+
+<file path=ppt/slides/slide25.xml><?xml version="1.0" encoding="utf-8"?>
+<p:sld xmlns:a="http://schemas.openxmlformats.org/drawingml/2006/main" xmlns:r="http://schemas.openxmlformats.org/officeDocument/2006/relationships" xmlns:p="http://schemas.openxmlformats.org/presentationml/2006/main">
+  <p:cSld>
+    <p:spTree>
+      <p:nvGrpSpPr>
+        <p:cNvPr id="1" name=""/>
+        <p:cNvGrpSpPr/>
+        <p:nvPr/>
+      </p:nvGrpSpPr>
+      <p:grpSpPr>
+        <a:xfrm>
+          <a:off x="0" y="0"/>
+          <a:ext cx="0" cy="0"/>
+          <a:chOff x="0" y="0"/>
+          <a:chExt cx="0" cy="0"/>
+        </a:xfrm>
+      </p:grpSpPr>
+      <p:sp>
+        <p:nvSpPr>
+          <p:cNvPr id="3" name="Content Placeholder 2"/>
+          <p:cNvSpPr>
+            <a:spLocks noGrp="1"/>
+          </p:cNvSpPr>
+          <p:nvPr>
+            <p:ph idx="1"/>
+          </p:nvPr>
+        </p:nvSpPr>
+        <p:spPr/>
+        <p:txBody>
+          <a:bodyPr/>
+          <a:lstStyle/>
+          <a:p>
+            <a:pPr lvl="0" indent="0" marL="0">
+              <a:spcBef>
+                <a:spcPts val="3000"/>
+              </a:spcBef>
+              <a:buNone/>
+            </a:pPr>
+            <a:r>
+              <a:rPr b="1"/>
+              <a:t>14. Analysis</a:t>
+            </a:r>
+          </a:p>
+          <a:p>
+            <a:pPr lvl="0"/>
+            <a:r>
+              <a:rPr b="1"/>
+              <a:t>Vibration ≫ current</a:t>
+            </a:r>
+            <a:r>
+              <a:rPr/>
+              <a:t> for inter-turn detection — physically expected (vibration responds directly; FOC suppresses current signatures).</a:t>
+            </a:r>
+          </a:p>
+          <a:p>
+            <a:pPr lvl="0"/>
+            <a:r>
+              <a:rPr b="1"/>
+              <a:t>Fusion</a:t>
+            </a:r>
+            <a:r>
+              <a:rPr/>
+              <a:t> beats current but not vibration alone on this small data.</a:t>
+            </a:r>
+          </a:p>
+          <a:p>
+            <a:pPr lvl="0"/>
+            <a:r>
+              <a:rPr/>
+              <a:t>Right </a:t>
+            </a:r>
+            <a:r>
+              <a:rPr b="1"/>
+              <a:t>metric matters</a:t>
+            </a:r>
+            <a:r>
+              <a:rPr/>
+              <a:t>: balanced accuracy exposed the majority-class collapse that raw accuracy hid.</a:t>
+            </a:r>
+          </a:p>
+        </p:txBody>
+      </p:sp>
+    </p:spTree>
+  </p:cSld>
+</p:sld>
+</file>
+
+<file path=ppt/slides/slide26.xml><?xml version="1.0" encoding="utf-8"?>
+<p:sld xmlns:a="http://schemas.openxmlformats.org/drawingml/2006/main" xmlns:r="http://schemas.openxmlformats.org/officeDocument/2006/relationships" xmlns:p="http://schemas.openxmlformats.org/presentationml/2006/main">
+  <p:cSld>
+    <p:spTree>
+      <p:nvGrpSpPr>
+        <p:cNvPr id="1" name=""/>
+        <p:cNvGrpSpPr/>
+        <p:nvPr/>
+      </p:nvGrpSpPr>
+      <p:grpSpPr>
+        <a:xfrm>
+          <a:off x="0" y="0"/>
+          <a:ext cx="0" cy="0"/>
+          <a:chOff x="0" y="0"/>
+          <a:chExt cx="0" cy="0"/>
+        </a:xfrm>
+      </p:grpSpPr>
+      <p:sp>
+        <p:nvSpPr>
+          <p:cNvPr id="3" name="Content Placeholder 2"/>
+          <p:cNvSpPr>
+            <a:spLocks noGrp="1"/>
+          </p:cNvSpPr>
+          <p:nvPr>
+            <p:ph idx="1"/>
+          </p:nvPr>
+        </p:nvSpPr>
+        <p:spPr/>
+        <p:txBody>
+          <a:bodyPr/>
+          <a:lstStyle/>
+          <a:p>
+            <a:pPr lvl="0" indent="0" marL="0">
+              <a:spcBef>
+                <a:spcPts val="3000"/>
+              </a:spcBef>
+              <a:buNone/>
+            </a:pPr>
+            <a:r>
+              <a:rPr b="1"/>
+              <a:t>15. Improvement experiments</a:t>
+            </a:r>
+          </a:p>
+          <a:p>
+            <a:pPr lvl="0"/>
+            <a:r>
+              <a:rPr b="1"/>
+              <a:t>Balancing</a:t>
+            </a:r>
+            <a:r>
+              <a:rPr/>
+              <a:t> removes the majority-class collapse (current healthy recall 0.00 → 1.00).</a:t>
+            </a:r>
+          </a:p>
+          <a:p>
+            <a:pPr lvl="0"/>
+            <a:r>
+              <a:rPr b="1"/>
+              <a:t>Image size</a:t>
+            </a:r>
+            <a:r>
+              <a:rPr/>
+              <a:t> &amp; </a:t>
+            </a:r>
+            <a:r>
+              <a:rPr b="1"/>
+              <a:t>training-set size</a:t>
+            </a:r>
+            <a:r>
+              <a:rPr/>
+              <a:t> studied (see </a:t>
+            </a:r>
+            <a:r>
+              <a:rPr>
+                <a:latin typeface="Courier"/>
+              </a:rPr>
+              <a:t>docs/experiments.md</a:t>
+            </a:r>
+            <a:r>
+              <a:rPr/>
+              <a:t>).</a:t>
+            </a:r>
+          </a:p>
+          <a:p>
+            <a:pPr lvl="0"/>
+            <a:r>
+              <a:rPr/>
+              <a:t>Overfitting controlled by dropout, global average pooling, augmentation and early stopping.</a:t>
+            </a:r>
+          </a:p>
+        </p:txBody>
+      </p:sp>
+    </p:spTree>
+  </p:cSld>
+</p:sld>
+</file>
+
+<file path=ppt/slides/slide27.xml><?xml version="1.0" encoding="utf-8"?>
+<p:sld xmlns:a="http://schemas.openxmlformats.org/drawingml/2006/main" xmlns:r="http://schemas.openxmlformats.org/officeDocument/2006/relationships" xmlns:p="http://schemas.openxmlformats.org/presentationml/2006/main">
+  <p:cSld>
+    <p:spTree>
+      <p:nvGrpSpPr>
+        <p:cNvPr id="1" name=""/>
+        <p:cNvGrpSpPr/>
+        <p:nvPr/>
+      </p:nvGrpSpPr>
+      <p:grpSpPr>
+        <a:xfrm>
+          <a:off x="0" y="0"/>
+          <a:ext cx="0" cy="0"/>
+          <a:chOff x="0" y="0"/>
+          <a:chExt cx="0" cy="0"/>
+        </a:xfrm>
+      </p:grpSpPr>
+      <p:sp>
+        <p:nvSpPr>
+          <p:cNvPr id="3" name="Content Placeholder 2"/>
+          <p:cNvSpPr>
+            <a:spLocks noGrp="1"/>
+          </p:cNvSpPr>
+          <p:nvPr>
+            <p:ph idx="1"/>
+          </p:nvPr>
+        </p:nvSpPr>
+        <p:spPr/>
+        <p:txBody>
+          <a:bodyPr/>
+          <a:lstStyle/>
+          <a:p>
+            <a:pPr lvl="0" indent="0" marL="0">
+              <a:spcBef>
+                <a:spcPts val="3000"/>
+              </a:spcBef>
+              <a:buNone/>
+            </a:pPr>
+            <a:r>
+              <a:rPr b="1"/>
+              <a:t>16. Limitations</a:t>
+            </a:r>
+          </a:p>
+          <a:p>
+            <a:pPr lvl="0"/>
+            <a:r>
+              <a:rPr/>
+              <a:t>Only </a:t>
+            </a:r>
+            <a:r>
+              <a:rPr b="1"/>
+              <a:t>4 distinct healthy recordings</a:t>
+            </a:r>
+            <a:r>
+              <a:rPr/>
+              <a:t> → perfect vibration score can’t yet exclude a </a:t>
+            </a:r>
+            <a:r>
+              <a:rPr i="1"/>
+              <a:t>recording-identity</a:t>
+            </a:r>
+            <a:r>
+              <a:rPr/>
+              <a:t> shortcut.</a:t>
+            </a:r>
+          </a:p>
+          <a:p>
+            <a:pPr lvl="0"/>
+            <a:r>
+              <a:rPr/>
+              <a:t>Demagnetization / Overload only synthetic.</a:t>
+            </a:r>
+          </a:p>
+          <a:p>
+            <a:pPr lvl="0"/>
+            <a:r>
+              <a:rPr/>
+              <a:t>Fusion comparison indicative, not strictly controlled.</a:t>
+            </a:r>
+          </a:p>
+        </p:txBody>
+      </p:sp>
+    </p:spTree>
+  </p:cSld>
+</p:sld>
+</file>
+
+<file path=ppt/slides/slide28.xml><?xml version="1.0" encoding="utf-8"?>
+<p:sld xmlns:a="http://schemas.openxmlformats.org/drawingml/2006/main" xmlns:r="http://schemas.openxmlformats.org/officeDocument/2006/relationships" xmlns:p="http://schemas.openxmlformats.org/presentationml/2006/main">
+  <p:cSld>
+    <p:spTree>
+      <p:nvGrpSpPr>
+        <p:cNvPr id="1" name=""/>
+        <p:cNvGrpSpPr/>
+        <p:nvPr/>
+      </p:nvGrpSpPr>
+      <p:grpSpPr>
+        <a:xfrm>
+          <a:off x="0" y="0"/>
+          <a:ext cx="0" cy="0"/>
+          <a:chOff x="0" y="0"/>
+          <a:chExt cx="0" cy="0"/>
+        </a:xfrm>
+      </p:grpSpPr>
+      <p:sp>
+        <p:nvSpPr>
+          <p:cNvPr id="3" name="Content Placeholder 2"/>
+          <p:cNvSpPr>
+            <a:spLocks noGrp="1"/>
+          </p:cNvSpPr>
+          <p:nvPr>
+            <p:ph idx="1"/>
+          </p:nvPr>
+        </p:nvSpPr>
+        <p:spPr/>
+        <p:txBody>
+          <a:bodyPr/>
+          <a:lstStyle/>
+          <a:p>
+            <a:pPr lvl="0" indent="0" marL="0">
+              <a:spcBef>
+                <a:spcPts val="3000"/>
+              </a:spcBef>
+              <a:buNone/>
+            </a:pPr>
+            <a:r>
+              <a:rPr b="1"/>
+              <a:t>17. Conclusions &amp; future work</a:t>
+            </a:r>
+          </a:p>
+          <a:p>
+            <a:pPr lvl="0"/>
+            <a:r>
+              <a:rPr/>
+              <a:t>A reproducible scalogram + CNN pipeline detects inter-turn PMSM faults; </a:t>
+            </a:r>
+            <a:r>
+              <a:rPr b="1"/>
+              <a:t>vibration reaches balanced accuracy 1.00</a:t>
+            </a:r>
+            <a:r>
+              <a:rPr/>
+              <a:t> on held-out recordings.</a:t>
+            </a:r>
+          </a:p>
+          <a:p>
+            <a:pPr lvl="0"/>
+            <a:r>
+              <a:rPr/>
+              <a:t>Future: more independent recordings; paired multi-channel fusion; severity-aware targets; explainability (Grad-CAM); on-line deployment in the drive.</a:t>
+            </a:r>
+          </a:p>
+        </p:txBody>
+      </p:sp>
+    </p:spTree>
+  </p:cSld>
+</p:sld>
+</file>
+
+<file path=ppt/slides/slide29.xml><?xml version="1.0" encoding="utf-8"?>
+<p:sld xmlns:a="http://schemas.openxmlformats.org/drawingml/2006/main" xmlns:r="http://schemas.openxmlformats.org/officeDocument/2006/relationships" xmlns:p="http://schemas.openxmlformats.org/presentationml/2006/main">
+  <p:cSld>
+    <p:spTree>
+      <p:nvGrpSpPr>
+        <p:cNvPr id="1" name=""/>
+        <p:cNvGrpSpPr/>
+        <p:nvPr/>
+      </p:nvGrpSpPr>
+      <p:grpSpPr>
+        <a:xfrm>
+          <a:off x="0" y="0"/>
+          <a:ext cx="0" cy="0"/>
+          <a:chOff x="0" y="0"/>
+          <a:chExt cx="0" cy="0"/>
+        </a:xfrm>
+      </p:grpSpPr>
+      <p:sp>
+        <p:nvSpPr>
           <p:cNvPr id="2" name="Title 1"/>
           <p:cNvSpPr>
             <a:spLocks noGrp="1"/>
@@ -5735,7 +5962,7 @@
         </p:blipFill>
         <p:spPr bwMode="auto">
           <a:xfrm>
-            <a:off x="3568700" y="1320800"/>
+            <a:off x="3568700" y="1574800"/>
             <a:ext cx="5105400" cy="1638300"/>
           </a:xfrm>
           <a:prstGeom prst="rect">
@@ -5749,107 +5976,6 @@
           </a:ln>
         </p:spPr>
       </p:pic>
-      <p:sp>
-        <p:nvSpPr>
-          <p:cNvPr id="1" name="TextBox 3"/>
-          <p:cNvSpPr txBox="1"/>
-          <p:nvPr>
-            <p:ph idx="1"/>
-          </p:nvPr>
-        </p:nvSpPr>
-        <p:spPr>
-          <a:xfrm>
-            <a:off x="3568700" y="4076700"/>
-            <a:ext cx="5105400" cy="508000"/>
-          </a:xfrm>
-          <a:prstGeom prst="rect">
-            <a:avLst/>
-          </a:prstGeom>
-          <a:noFill/>
-        </p:spPr>
-        <p:txBody>
-          <a:bodyPr/>
-          <a:lstStyle/>
-          <a:p>
-            <a:pPr lvl="0" indent="0" marL="0" algn="ctr">
-              <a:buNone/>
-            </a:pPr>
-            <a:r>
-              <a:rPr/>
-              <a:t>w:780</a:t>
-            </a:r>
-          </a:p>
-        </p:txBody>
-      </p:sp>
-      <p:sp>
-        <p:nvSpPr>
-          <p:cNvPr id="3" name="Content Placeholder 2"/>
-          <p:cNvSpPr>
-            <a:spLocks noGrp="1"/>
-          </p:cNvSpPr>
-          <p:nvPr>
-            <p:ph idx="1"/>
-          </p:nvPr>
-        </p:nvSpPr>
-        <p:spPr/>
-        <p:txBody>
-          <a:bodyPr/>
-          <a:lstStyle/>
-          <a:p>
-            <a:pPr lvl="0"/>
-            <a:r>
-              <a:rPr/>
-              <a:t>Stator (3-phase winding) + PM rotor; driven by an </a:t>
-            </a:r>
-            <a:r>
-              <a:rPr b="1"/>
-              <a:t>inverter</a:t>
-            </a:r>
-            <a:r>
-              <a:rPr/>
-              <a:t> under </a:t>
-            </a:r>
-            <a:r>
-              <a:rPr b="1"/>
-              <a:t>FOC</a:t>
-            </a:r>
-            <a:r>
-              <a:rPr/>
-              <a:t>.</a:t>
-            </a:r>
-          </a:p>
-          <a:p>
-            <a:pPr lvl="0"/>
-            <a:r>
-              <a:rPr/>
-              <a:t>The current loop </a:t>
-            </a:r>
-            <a:r>
-              <a:rPr b="1"/>
-              <a:t>rejects disturbances → it masks the fault in the current</a:t>
-            </a:r>
-            <a:r>
-              <a:rPr/>
-              <a:t>.</a:t>
-            </a:r>
-          </a:p>
-          <a:p>
-            <a:pPr lvl="0"/>
-            <a:r>
-              <a:rPr/>
-              <a:t>That is </a:t>
-            </a:r>
-            <a:r>
-              <a:rPr i="1"/>
-              <a:t>why vibration detects inter-turn faults far better</a:t>
-            </a:r>
-            <a:r>
-              <a:rPr/>
-              <a:t> (our key result).</a:t>
-            </a:r>
-          </a:p>
-        </p:txBody>
-      </p:sp>
     </p:spTree>
   </p:cSld>
 </p:sld>
@@ -5874,104 +6000,14 @@
       </p:grpSpPr>
       <p:sp>
         <p:nvSpPr>
-          <p:cNvPr id="4" name="Text Placeholder 3"/>
-          <p:cNvSpPr>
-            <a:spLocks noGrp="1"/>
-          </p:cNvSpPr>
-          <p:nvPr>
-            <p:ph idx="2" sz="half" type="body"/>
-          </p:nvPr>
-        </p:nvSpPr>
-        <p:spPr/>
-        <p:txBody>
-          <a:bodyPr/>
-          <a:lstStyle/>
-          <a:p>
-            <a:pPr lvl="0" indent="0" marL="0">
-              <a:spcBef>
-                <a:spcPts val="3000"/>
-              </a:spcBef>
-              <a:buNone/>
-            </a:pPr>
-            <a:r>
-              <a:rPr b="1"/>
-              <a:t>PMSM vs its relatives</a:t>
-            </a:r>
-          </a:p>
-        </p:txBody>
-      </p:sp>
-      <p:pic>
-        <p:nvPicPr>
-          <p:cNvPr descr="../figures/fig_motor_comparison.png" id="0" name="Picture 1"/>
-          <p:cNvPicPr>
-            <a:picLocks noGrp="1" noChangeAspect="1"/>
-          </p:cNvPicPr>
-          <p:nvPr/>
-        </p:nvPicPr>
-        <p:blipFill>
-          <a:blip r:embed="rId2"/>
-          <a:stretch>
-            <a:fillRect/>
-          </a:stretch>
-        </p:blipFill>
-        <p:spPr bwMode="auto">
-          <a:xfrm>
-            <a:off x="3568700" y="1270000"/>
-            <a:ext cx="5105400" cy="1727200"/>
-          </a:xfrm>
-          <a:prstGeom prst="rect">
-            <a:avLst/>
-          </a:prstGeom>
-          <a:noFill/>
-          <a:ln w="9525">
-            <a:noFill/>
-            <a:headEnd/>
-            <a:tailEnd/>
-          </a:ln>
-        </p:spPr>
-      </p:pic>
-      <p:sp>
-        <p:nvSpPr>
-          <p:cNvPr id="1" name="TextBox 3"/>
-          <p:cNvSpPr txBox="1"/>
+          <p:cNvPr id="3" name="Content Placeholder 2"/>
+          <p:cNvSpPr>
+            <a:spLocks noGrp="1"/>
+          </p:cNvSpPr>
           <p:nvPr>
             <p:ph idx="1"/>
           </p:nvPr>
         </p:nvSpPr>
-        <p:spPr>
-          <a:xfrm>
-            <a:off x="3568700" y="4076700"/>
-            <a:ext cx="5105400" cy="508000"/>
-          </a:xfrm>
-          <a:prstGeom prst="rect">
-            <a:avLst/>
-          </a:prstGeom>
-          <a:noFill/>
-        </p:spPr>
-        <p:txBody>
-          <a:bodyPr/>
-          <a:lstStyle/>
-          <a:p>
-            <a:pPr lvl="0" indent="0" marL="0" algn="ctr">
-              <a:buNone/>
-            </a:pPr>
-            <a:r>
-              <a:rPr/>
-              <a:t>w:880</a:t>
-            </a:r>
-          </a:p>
-        </p:txBody>
-      </p:sp>
-      <p:sp>
-        <p:nvSpPr>
-          <p:cNvPr id="3" name="Content Placeholder 2"/>
-          <p:cNvSpPr>
-            <a:spLocks noGrp="1"/>
-          </p:cNvSpPr>
-          <p:nvPr>
-            <p:ph idx="1"/>
-          </p:nvPr>
-        </p:nvSpPr>
         <p:spPr/>
         <p:txBody>
           <a:bodyPr/>
@@ -5980,45 +6016,53 @@
             <a:pPr lvl="0"/>
             <a:r>
               <a:rPr/>
-              <a:t>vs </a:t>
-            </a:r>
-            <a:r>
-              <a:rPr b="1"/>
-              <a:t>PMDC</a:t>
-            </a:r>
-            <a:r>
-              <a:rPr/>
-              <a:t>: same easy torque control, but no brushes → less maintenance.</a:t>
+              <a:t>Stator (3-phase winding) + PM rotor; driven by an </a:t>
+            </a:r>
+            <a:r>
+              <a:rPr b="1"/>
+              <a:t>inverter</a:t>
+            </a:r>
+            <a:r>
+              <a:rPr/>
+              <a:t> under </a:t>
+            </a:r>
+            <a:r>
+              <a:rPr b="1"/>
+              <a:t>FOC</a:t>
+            </a:r>
+            <a:r>
+              <a:rPr/>
+              <a:t>.</a:t>
             </a:r>
           </a:p>
           <a:p>
             <a:pPr lvl="0"/>
             <a:r>
               <a:rPr/>
-              <a:t>vs </a:t>
-            </a:r>
-            <a:r>
-              <a:rPr b="1"/>
-              <a:t>BLDC</a:t>
-            </a:r>
-            <a:r>
-              <a:rPr/>
-              <a:t>: sinusoidal back-EMF + FOC → smoother torque, higher efficiency.</a:t>
+              <a:t>The current loop </a:t>
+            </a:r>
+            <a:r>
+              <a:rPr b="1"/>
+              <a:t>rejects disturbances → it masks the fault in the current</a:t>
+            </a:r>
+            <a:r>
+              <a:rPr/>
+              <a:t>.</a:t>
             </a:r>
           </a:p>
           <a:p>
             <a:pPr lvl="0"/>
             <a:r>
               <a:rPr/>
-              <a:t>vs </a:t>
-            </a:r>
-            <a:r>
-              <a:rPr b="1"/>
-              <a:t>Induction</a:t>
-            </a:r>
-            <a:r>
-              <a:rPr/>
-              <a:t>: no rotor current/slip → higher efficiency &amp; torque density.</a:t>
+              <a:t>That is </a:t>
+            </a:r>
+            <a:r>
+              <a:rPr i="1"/>
+              <a:t>why vibration detects inter-turn faults far better</a:t>
+            </a:r>
+            <a:r>
+              <a:rPr/>
+              <a:t> (our key result).</a:t>
             </a:r>
           </a:p>
         </p:txBody>
@@ -6068,14 +6112,14 @@
             </a:pPr>
             <a:r>
               <a:rPr b="1"/>
-              <a:t>Detecting the fault — today vs this work</a:t>
+              <a:t>PMSM vs its relatives</a:t>
             </a:r>
           </a:p>
         </p:txBody>
       </p:sp>
       <p:pic>
         <p:nvPicPr>
-          <p:cNvPr descr="../figures/fig_detection_taxonomy.png" id="0" name="Picture 1"/>
+          <p:cNvPr descr="../figures/fig_motor_comparison.png" id="0" name="Picture 1"/>
           <p:cNvPicPr>
             <a:picLocks noGrp="1" noChangeAspect="1"/>
           </p:cNvPicPr>
@@ -6089,8 +6133,8 @@
         </p:blipFill>
         <p:spPr bwMode="auto">
           <a:xfrm>
-            <a:off x="3568700" y="1130300"/>
-            <a:ext cx="5105400" cy="2006600"/>
+            <a:off x="3568700" y="1524000"/>
+            <a:ext cx="5105400" cy="1727200"/>
           </a:xfrm>
           <a:prstGeom prst="rect">
             <a:avLst/>
@@ -6103,95 +6147,6 @@
           </a:ln>
         </p:spPr>
       </p:pic>
-      <p:sp>
-        <p:nvSpPr>
-          <p:cNvPr id="1" name="TextBox 3"/>
-          <p:cNvSpPr txBox="1"/>
-          <p:nvPr>
-            <p:ph idx="1"/>
-          </p:nvPr>
-        </p:nvSpPr>
-        <p:spPr>
-          <a:xfrm>
-            <a:off x="3568700" y="4076700"/>
-            <a:ext cx="5105400" cy="508000"/>
-          </a:xfrm>
-          <a:prstGeom prst="rect">
-            <a:avLst/>
-          </a:prstGeom>
-          <a:noFill/>
-        </p:spPr>
-        <p:txBody>
-          <a:bodyPr/>
-          <a:lstStyle/>
-          <a:p>
-            <a:pPr lvl="0" indent="0" marL="0" algn="ctr">
-              <a:buNone/>
-            </a:pPr>
-            <a:r>
-              <a:rPr/>
-              <a:t>w:820</a:t>
-            </a:r>
-          </a:p>
-        </p:txBody>
-      </p:sp>
-      <p:sp>
-        <p:nvSpPr>
-          <p:cNvPr id="3" name="Content Placeholder 2"/>
-          <p:cNvSpPr>
-            <a:spLocks noGrp="1"/>
-          </p:cNvSpPr>
-          <p:nvPr>
-            <p:ph idx="1"/>
-          </p:nvPr>
-        </p:nvSpPr>
-        <p:spPr/>
-        <p:txBody>
-          <a:bodyPr/>
-          <a:lstStyle/>
-          <a:p>
-            <a:pPr lvl="0"/>
-            <a:r>
-              <a:rPr/>
-              <a:t>Manual/offline (thermal, </a:t>
-            </a:r>
-            <a:r>
-              <a:rPr b="1"/>
-              <a:t>Megger</a:t>
-            </a:r>
-            <a:r>
-              <a:rPr/>
-              <a:t>, surge) → need shutdown, periodic.</a:t>
-            </a:r>
-          </a:p>
-          <a:p>
-            <a:pPr lvl="0"/>
-            <a:r>
-              <a:rPr/>
-              <a:t>Online MCSA/vibration FFT → fixed thresholds, fooled by load/speed.</a:t>
-            </a:r>
-          </a:p>
-          <a:p>
-            <a:pPr lvl="0"/>
-            <a:r>
-              <a:rPr b="1"/>
-              <a:t>CWT scalogram + CNN</a:t>
-            </a:r>
-            <a:r>
-              <a:rPr/>
-              <a:t> → learns features, robust, detects </a:t>
-            </a:r>
-            <a:r>
-              <a:rPr b="1"/>
-              <a:t>earlier</a:t>
-            </a:r>
-            <a:r>
-              <a:rPr/>
-              <a:t>.</a:t>
-            </a:r>
-          </a:p>
-        </p:txBody>
-      </p:sp>
     </p:spTree>
   </p:cSld>
 </p:sld>

--- a/docs/build/slides.pptx
+++ b/docs/build/slides.pptx
@@ -4317,7 +4317,7 @@
             </a:pPr>
             <a:r>
               <a:rPr b="1"/>
-              <a:t>«University Name — Faculty»</a:t>
+              <a:t>Aleppo University — Faculty of Electrical &amp; Electronic Engineering</a:t>
             </a:r>
             <a:r>
               <a:rPr/>
@@ -4325,7 +4325,7 @@
             </a:r>
             <a:r>
               <a:rPr b="1"/>
-              <a:t>«Department / Program»</a:t>
+              <a:t>Department of Mechatronics Engineering</a:t>
             </a:r>
           </a:p>
           <a:p>
@@ -4359,15 +4359,15 @@
             </a:r>
             <a:r>
               <a:rPr b="1"/>
-              <a:t>«Dr. Supervisor Name»</a:t>
-            </a:r>
-            <a:r>
-              <a:rPr/>
-              <a:t> · Academic year: </a:t>
-            </a:r>
-            <a:r>
-              <a:rPr b="1"/>
-              <a:t>«2025–2026»</a:t>
+              <a:t>Eng. Saad Almoustafa</a:t>
+            </a:r>
+            <a:r>
+              <a:rPr/>
+              <a:t> · Year: </a:t>
+            </a:r>
+            <a:r>
+              <a:rPr b="1"/>
+              <a:t>Fourth Year</a:t>
             </a:r>
           </a:p>
           <a:p>
